--- a/public/lessons/year-6-maths/spring/week-15/add-decimals/teaching-powerpoint-v1.pptx
+++ b/public/lessons/year-6-maths/spring/week-15/add-decimals/teaching-powerpoint-v1.pptx
@@ -2,24 +2,24 @@
 <file path=ppt/presentation.xml><?xml version="1.0" encoding="utf-8"?>
 <p:presentation xmlns:p="http://schemas.openxmlformats.org/presentationml/2006/main">
   <p:sldMasterIdLst>
-    <p:sldMasterId xmlns:r="http://schemas.openxmlformats.org/officeDocument/2006/relationships" id="2147483648" r:id="R9408a875cebd4bfa"/>
+    <p:sldMasterId xmlns:r="http://schemas.openxmlformats.org/officeDocument/2006/relationships" id="2147483648" r:id="R1d2b9525adc64a37"/>
   </p:sldMasterIdLst>
   <p:notesMasterIdLst>
-    <p:notesMasterId xmlns:r="http://schemas.openxmlformats.org/officeDocument/2006/relationships" r:id="R50daa7be5ee6451c"/>
+    <p:notesMasterId xmlns:r="http://schemas.openxmlformats.org/officeDocument/2006/relationships" r:id="R761090596cc5460f"/>
   </p:notesMasterIdLst>
   <p:sldIdLst>
-    <p:sldId xmlns:r="http://schemas.openxmlformats.org/officeDocument/2006/relationships" id="256" r:id="R297d717458994e29"/>
-    <p:sldId xmlns:r="http://schemas.openxmlformats.org/officeDocument/2006/relationships" id="257" r:id="R33c03b7780a74893"/>
-    <p:sldId xmlns:r="http://schemas.openxmlformats.org/officeDocument/2006/relationships" id="258" r:id="R300c1f00e5234db5"/>
-    <p:sldId xmlns:r="http://schemas.openxmlformats.org/officeDocument/2006/relationships" id="259" r:id="R4658fac61a0749c7"/>
-    <p:sldId xmlns:r="http://schemas.openxmlformats.org/officeDocument/2006/relationships" id="260" r:id="Re49053e5c0ac416c"/>
-    <p:sldId xmlns:r="http://schemas.openxmlformats.org/officeDocument/2006/relationships" id="261" r:id="R9cebc555377c4129"/>
-    <p:sldId xmlns:r="http://schemas.openxmlformats.org/officeDocument/2006/relationships" id="262" r:id="R787bbf9a348049ea"/>
-    <p:sldId xmlns:r="http://schemas.openxmlformats.org/officeDocument/2006/relationships" id="263" r:id="R2a7195af2c2c405c"/>
-    <p:sldId xmlns:r="http://schemas.openxmlformats.org/officeDocument/2006/relationships" id="264" r:id="R908328e8b6f549d5"/>
-    <p:sldId xmlns:r="http://schemas.openxmlformats.org/officeDocument/2006/relationships" id="265" r:id="Rcdaab517ecf64e40"/>
-    <p:sldId xmlns:r="http://schemas.openxmlformats.org/officeDocument/2006/relationships" id="266" r:id="R346e3912cd58441a"/>
-    <p:sldId xmlns:r="http://schemas.openxmlformats.org/officeDocument/2006/relationships" id="267" r:id="R61841c9b09c54e28"/>
+    <p:sldId xmlns:r="http://schemas.openxmlformats.org/officeDocument/2006/relationships" id="256" r:id="Rf977ae3cb53b48a4"/>
+    <p:sldId xmlns:r="http://schemas.openxmlformats.org/officeDocument/2006/relationships" id="257" r:id="R44859342e8564e2f"/>
+    <p:sldId xmlns:r="http://schemas.openxmlformats.org/officeDocument/2006/relationships" id="258" r:id="R7ce20b3a09174c32"/>
+    <p:sldId xmlns:r="http://schemas.openxmlformats.org/officeDocument/2006/relationships" id="259" r:id="Rfeea10b545bd4822"/>
+    <p:sldId xmlns:r="http://schemas.openxmlformats.org/officeDocument/2006/relationships" id="260" r:id="Rcfed9eaead3d4c41"/>
+    <p:sldId xmlns:r="http://schemas.openxmlformats.org/officeDocument/2006/relationships" id="261" r:id="Rb6eef2dd8eb54c45"/>
+    <p:sldId xmlns:r="http://schemas.openxmlformats.org/officeDocument/2006/relationships" id="262" r:id="Rb4b1c1a128214d42"/>
+    <p:sldId xmlns:r="http://schemas.openxmlformats.org/officeDocument/2006/relationships" id="263" r:id="R884927c63cec4cbc"/>
+    <p:sldId xmlns:r="http://schemas.openxmlformats.org/officeDocument/2006/relationships" id="264" r:id="R282f9169280b460f"/>
+    <p:sldId xmlns:r="http://schemas.openxmlformats.org/officeDocument/2006/relationships" id="265" r:id="R43a47a982c7d4de2"/>
+    <p:sldId xmlns:r="http://schemas.openxmlformats.org/officeDocument/2006/relationships" id="266" r:id="R01f8d578397f411d"/>
+    <p:sldId xmlns:r="http://schemas.openxmlformats.org/officeDocument/2006/relationships" id="267" r:id="Rc2b1c9011873460a"/>
   </p:sldIdLst>
   <p:sldSz cx="12192000" cy="6858000"/>
   <p:notesSz cx="6858000" cy="9144000"/>
@@ -873,7 +873,7 @@
           <a:lstStyle xmlns:a="http://schemas.openxmlformats.org/drawingml/2006/main"/>
           <a:p xmlns:a="http://schemas.openxmlformats.org/drawingml/2006/main">
             <a:r>
-              <a:t>I do. Reveal the question, setup and each calculation stage one click at a time. Pupils watch before copying. Model answer: 43.656.</a:t>
+              <a:t>I do. Reveal the question, then reveal each mathematical change one click at a time. Point to the numbers and operation that changed before moving to the next line. Final answer: 43.656.</a:t>
             </a:r>
           </a:p>
         </p:txBody>
@@ -1291,7 +1291,7 @@
   </p:cSld>
   <p:clrMap bg1="lt1" tx1="dk1" bg2="lt2" tx2="dk2" accent1="accent1" accent2="accent2" accent3="accent3" accent4="accent4" accent5="accent5" accent6="accent6" hlink="hlink" folHlink="folHlink"/>
   <p:sldLayoutIdLst>
-    <p:sldLayoutId xmlns:r="http://schemas.openxmlformats.org/officeDocument/2006/relationships" id="2147483649" r:id="R0d96baa1a1a9434b"/>
+    <p:sldLayoutId xmlns:r="http://schemas.openxmlformats.org/officeDocument/2006/relationships" id="2147483649" r:id="R810fc4d5c6b04512"/>
   </p:sldLayoutIdLst>
   <p:txStyles>
     <p:titleStyle>
@@ -1842,7 +1842,7 @@
           <p:cNvPr id="12" name="">
             <a:extLst xmlns:a="http://schemas.openxmlformats.org/drawingml/2006/main">
               <a:ext uri="{FF2B5EF4-FFF2-40B4-BE49-F238E27FC236}">
-                <a16:creationId xmlns:a16="http://schemas.microsoft.com/office/drawing/2014/main" id="{D8ADEA78-3BE4-4B12-B63E-FCDD466D04FB}"/>
+                <a16:creationId xmlns:a16="http://schemas.microsoft.com/office/drawing/2014/main" id="{F9F0B3B5-59B8-42C6-BFFF-96741276E2C6}"/>
               </a:ext>
             </a:extLst>
           </p:cNvPr>
@@ -1874,7 +1874,7 @@
           <p:cNvPr id="2" name="">
             <a:extLst xmlns:a="http://schemas.openxmlformats.org/drawingml/2006/main">
               <a:ext uri="{FF2B5EF4-FFF2-40B4-BE49-F238E27FC236}">
-                <a16:creationId xmlns:a16="http://schemas.microsoft.com/office/drawing/2014/main" id="{94C38B36-E06B-4863-8F0B-F1A995C03F3E}"/>
+                <a16:creationId xmlns:a16="http://schemas.microsoft.com/office/drawing/2014/main" id="{7E3FCFB9-0620-4941-B066-EA15D54B1A3E}"/>
               </a:ext>
             </a:extLst>
           </p:cNvPr>
@@ -1931,7 +1931,7 @@
           <p:cNvPr id="3" name="">
             <a:extLst xmlns:a="http://schemas.openxmlformats.org/drawingml/2006/main">
               <a:ext uri="{FF2B5EF4-FFF2-40B4-BE49-F238E27FC236}">
-                <a16:creationId xmlns:a16="http://schemas.microsoft.com/office/drawing/2014/main" id="{CE291467-3295-4F71-BF34-327413446614}"/>
+                <a16:creationId xmlns:a16="http://schemas.microsoft.com/office/drawing/2014/main" id="{679C03B3-72C1-483F-876C-421C14748A14}"/>
               </a:ext>
             </a:extLst>
           </p:cNvPr>
@@ -1965,7 +1965,7 @@
           <p:cNvPr id="4" name="">
             <a:extLst xmlns:a="http://schemas.openxmlformats.org/drawingml/2006/main">
               <a:ext uri="{FF2B5EF4-FFF2-40B4-BE49-F238E27FC236}">
-                <a16:creationId xmlns:a16="http://schemas.microsoft.com/office/drawing/2014/main" id="{9D5D7555-CBC1-407C-9FF8-4DB1426EEEE1}"/>
+                <a16:creationId xmlns:a16="http://schemas.microsoft.com/office/drawing/2014/main" id="{9F7FAA73-6B8C-48B8-9206-0FF7091D2081}"/>
               </a:ext>
             </a:extLst>
           </p:cNvPr>
@@ -2022,7 +2022,7 @@
           <p:cNvPr id="5" name="">
             <a:extLst xmlns:a="http://schemas.openxmlformats.org/drawingml/2006/main">
               <a:ext uri="{FF2B5EF4-FFF2-40B4-BE49-F238E27FC236}">
-                <a16:creationId xmlns:a16="http://schemas.microsoft.com/office/drawing/2014/main" id="{22E91A21-426A-46C3-B1F2-B55FC9CCFAFC}"/>
+                <a16:creationId xmlns:a16="http://schemas.microsoft.com/office/drawing/2014/main" id="{71915522-CEAC-4C2B-A251-C3664FB17695}"/>
               </a:ext>
             </a:extLst>
           </p:cNvPr>
@@ -2079,7 +2079,7 @@
           <p:cNvPr id="6" name="">
             <a:extLst xmlns:a="http://schemas.openxmlformats.org/drawingml/2006/main">
               <a:ext uri="{FF2B5EF4-FFF2-40B4-BE49-F238E27FC236}">
-                <a16:creationId xmlns:a16="http://schemas.microsoft.com/office/drawing/2014/main" id="{780FF0E3-1A6F-4337-AC7F-4311BD180F17}"/>
+                <a16:creationId xmlns:a16="http://schemas.microsoft.com/office/drawing/2014/main" id="{6CB0F860-72C6-4F57-A8B1-99C4ACF7AFF7}"/>
               </a:ext>
             </a:extLst>
           </p:cNvPr>
@@ -2113,7 +2113,7 @@
           <p:cNvPr id="7" name="">
             <a:extLst xmlns:a="http://schemas.openxmlformats.org/drawingml/2006/main">
               <a:ext uri="{FF2B5EF4-FFF2-40B4-BE49-F238E27FC236}">
-                <a16:creationId xmlns:a16="http://schemas.microsoft.com/office/drawing/2014/main" id="{2008DE38-69DF-46A1-BCEE-2448379E8301}"/>
+                <a16:creationId xmlns:a16="http://schemas.microsoft.com/office/drawing/2014/main" id="{7FC0168C-456E-4483-9A60-FF2D9F581DDF}"/>
               </a:ext>
             </a:extLst>
           </p:cNvPr>
@@ -2170,7 +2170,7 @@
           <p:cNvPr id="8" name="">
             <a:extLst xmlns:a="http://schemas.openxmlformats.org/drawingml/2006/main">
               <a:ext uri="{FF2B5EF4-FFF2-40B4-BE49-F238E27FC236}">
-                <a16:creationId xmlns:a16="http://schemas.microsoft.com/office/drawing/2014/main" id="{4F368C82-C77E-4406-AB82-2DD5C7645536}"/>
+                <a16:creationId xmlns:a16="http://schemas.microsoft.com/office/drawing/2014/main" id="{676C51CB-1935-4872-9698-09E6F1AA0D15}"/>
               </a:ext>
             </a:extLst>
           </p:cNvPr>
@@ -2227,7 +2227,7 @@
           <p:cNvPr id="9" name="">
             <a:extLst xmlns:a="http://schemas.openxmlformats.org/drawingml/2006/main">
               <a:ext uri="{FF2B5EF4-FFF2-40B4-BE49-F238E27FC236}">
-                <a16:creationId xmlns:a16="http://schemas.microsoft.com/office/drawing/2014/main" id="{3D5252E6-A993-4F63-B2A5-47FF9D7E6E8C}"/>
+                <a16:creationId xmlns:a16="http://schemas.microsoft.com/office/drawing/2014/main" id="{306846A7-B66B-470D-93B7-C62D27C40323}"/>
               </a:ext>
             </a:extLst>
           </p:cNvPr>
@@ -2284,7 +2284,7 @@
           <p:cNvPr id="10" name="">
             <a:extLst xmlns:a="http://schemas.openxmlformats.org/drawingml/2006/main">
               <a:ext uri="{FF2B5EF4-FFF2-40B4-BE49-F238E27FC236}">
-                <a16:creationId xmlns:a16="http://schemas.microsoft.com/office/drawing/2014/main" id="{1E277D1F-7EEB-49BA-BBF3-461ABB025B5C}"/>
+                <a16:creationId xmlns:a16="http://schemas.microsoft.com/office/drawing/2014/main" id="{F4EC33AF-AC9E-4003-8964-2E7E4880F899}"/>
               </a:ext>
             </a:extLst>
           </p:cNvPr>
@@ -2341,7 +2341,7 @@
           <p:cNvPr id="11" name="">
             <a:extLst xmlns:a="http://schemas.openxmlformats.org/drawingml/2006/main">
               <a:ext uri="{FF2B5EF4-FFF2-40B4-BE49-F238E27FC236}">
-                <a16:creationId xmlns:a16="http://schemas.microsoft.com/office/drawing/2014/main" id="{572DCB66-DC85-4B7C-9F57-AFBE4761C505}"/>
+                <a16:creationId xmlns:a16="http://schemas.microsoft.com/office/drawing/2014/main" id="{753E276E-28D5-4601-8700-624A8652F6AB}"/>
               </a:ext>
             </a:extLst>
           </p:cNvPr>
@@ -2396,7 +2396,7 @@
     </p:spTree>
     <p:extLst>
       <p:ext uri="{BB962C8B-B14F-4D97-AF65-F5344CB8AC3E}">
-        <p14:creationId xmlns:p14="http://schemas.microsoft.com/office/powerpoint/2010/main" val="1935330249"/>
+        <p14:creationId xmlns:p14="http://schemas.microsoft.com/office/powerpoint/2010/main" val="983155228"/>
       </p:ext>
     </p:extLst>
   </p:cSld>
@@ -2427,7 +2427,7 @@
           <p:cNvPr id="14" name="">
             <a:extLst xmlns:a="http://schemas.openxmlformats.org/drawingml/2006/main">
               <a:ext uri="{FF2B5EF4-FFF2-40B4-BE49-F238E27FC236}">
-                <a16:creationId xmlns:a16="http://schemas.microsoft.com/office/drawing/2014/main" id="{3792B835-C41A-4414-B3CE-F601F27234C9}"/>
+                <a16:creationId xmlns:a16="http://schemas.microsoft.com/office/drawing/2014/main" id="{42946E12-FB10-4F23-9D17-0CD7169F67B9}"/>
               </a:ext>
             </a:extLst>
           </p:cNvPr>
@@ -2459,7 +2459,7 @@
           <p:cNvPr id="2" name="">
             <a:extLst xmlns:a="http://schemas.openxmlformats.org/drawingml/2006/main">
               <a:ext uri="{FF2B5EF4-FFF2-40B4-BE49-F238E27FC236}">
-                <a16:creationId xmlns:a16="http://schemas.microsoft.com/office/drawing/2014/main" id="{B915FA58-6556-479A-B36D-CA54D7454EA7}"/>
+                <a16:creationId xmlns:a16="http://schemas.microsoft.com/office/drawing/2014/main" id="{EE37082F-334F-44BC-9AED-BF47495E237D}"/>
               </a:ext>
             </a:extLst>
           </p:cNvPr>
@@ -2516,7 +2516,7 @@
           <p:cNvPr id="3" name="">
             <a:extLst xmlns:a="http://schemas.openxmlformats.org/drawingml/2006/main">
               <a:ext uri="{FF2B5EF4-FFF2-40B4-BE49-F238E27FC236}">
-                <a16:creationId xmlns:a16="http://schemas.microsoft.com/office/drawing/2014/main" id="{A0ADB5AF-4AE1-4036-9CAB-8AE661227EA8}"/>
+                <a16:creationId xmlns:a16="http://schemas.microsoft.com/office/drawing/2014/main" id="{36B62E98-44D2-4F1A-AE9E-8D4A79CA907B}"/>
               </a:ext>
             </a:extLst>
           </p:cNvPr>
@@ -2548,7 +2548,7 @@
           <p:cNvPr id="4" name="">
             <a:extLst xmlns:a="http://schemas.openxmlformats.org/drawingml/2006/main">
               <a:ext uri="{FF2B5EF4-FFF2-40B4-BE49-F238E27FC236}">
-                <a16:creationId xmlns:a16="http://schemas.microsoft.com/office/drawing/2014/main" id="{BAC8F9B6-EFF3-4C47-9A7E-83FB725EE397}"/>
+                <a16:creationId xmlns:a16="http://schemas.microsoft.com/office/drawing/2014/main" id="{3A196354-442B-41D0-8284-4B57B1A9C588}"/>
               </a:ext>
             </a:extLst>
           </p:cNvPr>
@@ -2605,7 +2605,7 @@
           <p:cNvPr id="5" name="">
             <a:extLst xmlns:a="http://schemas.openxmlformats.org/drawingml/2006/main">
               <a:ext uri="{FF2B5EF4-FFF2-40B4-BE49-F238E27FC236}">
-                <a16:creationId xmlns:a16="http://schemas.microsoft.com/office/drawing/2014/main" id="{1F4F020E-DB4A-4AF9-9709-11B082503F1E}"/>
+                <a16:creationId xmlns:a16="http://schemas.microsoft.com/office/drawing/2014/main" id="{51A87A63-DC9D-47A8-9549-BCBDD41CF803}"/>
               </a:ext>
             </a:extLst>
           </p:cNvPr>
@@ -2662,7 +2662,7 @@
           <p:cNvPr id="6" name="">
             <a:extLst xmlns:a="http://schemas.openxmlformats.org/drawingml/2006/main">
               <a:ext uri="{FF2B5EF4-FFF2-40B4-BE49-F238E27FC236}">
-                <a16:creationId xmlns:a16="http://schemas.microsoft.com/office/drawing/2014/main" id="{DC821CE4-6E78-4926-977E-3B3D96FAF709}"/>
+                <a16:creationId xmlns:a16="http://schemas.microsoft.com/office/drawing/2014/main" id="{1AB06929-0A13-4258-9174-987E66D01513}"/>
               </a:ext>
             </a:extLst>
           </p:cNvPr>
@@ -2719,7 +2719,7 @@
           <p:cNvPr id="7" name="">
             <a:extLst xmlns:a="http://schemas.openxmlformats.org/drawingml/2006/main">
               <a:ext uri="{FF2B5EF4-FFF2-40B4-BE49-F238E27FC236}">
-                <a16:creationId xmlns:a16="http://schemas.microsoft.com/office/drawing/2014/main" id="{A971C969-4AE6-41EB-B5CB-1D7C904CB140}"/>
+                <a16:creationId xmlns:a16="http://schemas.microsoft.com/office/drawing/2014/main" id="{8DB20D3F-9303-4024-A2D3-ECFB38C25A67}"/>
               </a:ext>
             </a:extLst>
           </p:cNvPr>
@@ -2751,7 +2751,7 @@
           <p:cNvPr id="8" name="">
             <a:extLst xmlns:a="http://schemas.openxmlformats.org/drawingml/2006/main">
               <a:ext uri="{FF2B5EF4-FFF2-40B4-BE49-F238E27FC236}">
-                <a16:creationId xmlns:a16="http://schemas.microsoft.com/office/drawing/2014/main" id="{583FFC52-79CB-4F65-8826-135F1D1A2D91}"/>
+                <a16:creationId xmlns:a16="http://schemas.microsoft.com/office/drawing/2014/main" id="{C01B78AA-1ABB-4B72-939D-1F248028B48E}"/>
               </a:ext>
             </a:extLst>
           </p:cNvPr>
@@ -2808,7 +2808,7 @@
           <p:cNvPr id="9" name="">
             <a:extLst xmlns:a="http://schemas.openxmlformats.org/drawingml/2006/main">
               <a:ext uri="{FF2B5EF4-FFF2-40B4-BE49-F238E27FC236}">
-                <a16:creationId xmlns:a16="http://schemas.microsoft.com/office/drawing/2014/main" id="{5055F314-6F0B-4FF1-B6E6-CDD38D7EE29E}"/>
+                <a16:creationId xmlns:a16="http://schemas.microsoft.com/office/drawing/2014/main" id="{80D030A7-A2E0-4B90-8FE5-989503917FAD}"/>
               </a:ext>
             </a:extLst>
           </p:cNvPr>
@@ -2865,7 +2865,7 @@
           <p:cNvPr id="10" name="">
             <a:extLst xmlns:a="http://schemas.openxmlformats.org/drawingml/2006/main">
               <a:ext uri="{FF2B5EF4-FFF2-40B4-BE49-F238E27FC236}">
-                <a16:creationId xmlns:a16="http://schemas.microsoft.com/office/drawing/2014/main" id="{7E290B0E-4E28-4862-B33A-86407BE871FE}"/>
+                <a16:creationId xmlns:a16="http://schemas.microsoft.com/office/drawing/2014/main" id="{4E2A1EBD-2CE8-490C-9E3D-598E9C4F42CF}"/>
               </a:ext>
             </a:extLst>
           </p:cNvPr>
@@ -2922,7 +2922,7 @@
           <p:cNvPr id="11" name="">
             <a:extLst xmlns:a="http://schemas.openxmlformats.org/drawingml/2006/main">
               <a:ext uri="{FF2B5EF4-FFF2-40B4-BE49-F238E27FC236}">
-                <a16:creationId xmlns:a16="http://schemas.microsoft.com/office/drawing/2014/main" id="{5A4106FD-5758-48E1-BF27-0A4BF496B72F}"/>
+                <a16:creationId xmlns:a16="http://schemas.microsoft.com/office/drawing/2014/main" id="{5CCBD803-E3AC-44DF-AFD4-BEDCD22E8434}"/>
               </a:ext>
             </a:extLst>
           </p:cNvPr>
@@ -2979,7 +2979,7 @@
           <p:cNvPr id="12" name="">
             <a:extLst xmlns:a="http://schemas.openxmlformats.org/drawingml/2006/main">
               <a:ext uri="{FF2B5EF4-FFF2-40B4-BE49-F238E27FC236}">
-                <a16:creationId xmlns:a16="http://schemas.microsoft.com/office/drawing/2014/main" id="{AF596C38-8F12-4F55-82BF-C969A396AFAA}"/>
+                <a16:creationId xmlns:a16="http://schemas.microsoft.com/office/drawing/2014/main" id="{E819303D-D74D-4808-A8E9-38E3AA36F768}"/>
               </a:ext>
             </a:extLst>
           </p:cNvPr>
@@ -3036,7 +3036,7 @@
           <p:cNvPr id="13" name="">
             <a:extLst xmlns:a="http://schemas.openxmlformats.org/drawingml/2006/main">
               <a:ext uri="{FF2B5EF4-FFF2-40B4-BE49-F238E27FC236}">
-                <a16:creationId xmlns:a16="http://schemas.microsoft.com/office/drawing/2014/main" id="{D2A805CD-4851-4A85-AC17-6EDF6F4765C5}"/>
+                <a16:creationId xmlns:a16="http://schemas.microsoft.com/office/drawing/2014/main" id="{95103CE1-A482-4310-892A-06414E7FB6D9}"/>
               </a:ext>
             </a:extLst>
           </p:cNvPr>
@@ -3091,7 +3091,7 @@
     </p:spTree>
     <p:extLst>
       <p:ext uri="{BB962C8B-B14F-4D97-AF65-F5344CB8AC3E}">
-        <p14:creationId xmlns:p14="http://schemas.microsoft.com/office/powerpoint/2010/main" val="1484727934"/>
+        <p14:creationId xmlns:p14="http://schemas.microsoft.com/office/powerpoint/2010/main" val="498369474"/>
       </p:ext>
     </p:extLst>
   </p:cSld>
@@ -3292,7 +3292,7 @@
           <p:cNvPr id="19" name="">
             <a:extLst xmlns:a="http://schemas.openxmlformats.org/drawingml/2006/main">
               <a:ext uri="{FF2B5EF4-FFF2-40B4-BE49-F238E27FC236}">
-                <a16:creationId xmlns:a16="http://schemas.microsoft.com/office/drawing/2014/main" id="{4E63E3E8-CEC1-42D6-AE56-979F2982246F}"/>
+                <a16:creationId xmlns:a16="http://schemas.microsoft.com/office/drawing/2014/main" id="{41694A4D-3D72-4ADA-AB9D-29A0D194A6AE}"/>
               </a:ext>
             </a:extLst>
           </p:cNvPr>
@@ -3324,7 +3324,7 @@
           <p:cNvPr id="2" name="">
             <a:extLst xmlns:a="http://schemas.openxmlformats.org/drawingml/2006/main">
               <a:ext uri="{FF2B5EF4-FFF2-40B4-BE49-F238E27FC236}">
-                <a16:creationId xmlns:a16="http://schemas.microsoft.com/office/drawing/2014/main" id="{0BDBCF61-B13E-4394-83CB-F33BA483B2BE}"/>
+                <a16:creationId xmlns:a16="http://schemas.microsoft.com/office/drawing/2014/main" id="{2ABECB75-0149-40AC-B873-E8C8818CD07B}"/>
               </a:ext>
             </a:extLst>
           </p:cNvPr>
@@ -3381,7 +3381,7 @@
           <p:cNvPr id="3" name="">
             <a:extLst xmlns:a="http://schemas.openxmlformats.org/drawingml/2006/main">
               <a:ext uri="{FF2B5EF4-FFF2-40B4-BE49-F238E27FC236}">
-                <a16:creationId xmlns:a16="http://schemas.microsoft.com/office/drawing/2014/main" id="{F9C93C0E-1710-41DD-8192-4BAA4248B8A5}"/>
+                <a16:creationId xmlns:a16="http://schemas.microsoft.com/office/drawing/2014/main" id="{21680ED4-FBFC-41A6-ADDA-1C5B3BD21B1A}"/>
               </a:ext>
             </a:extLst>
           </p:cNvPr>
@@ -3413,7 +3413,7 @@
           <p:cNvPr id="4" name="">
             <a:extLst xmlns:a="http://schemas.openxmlformats.org/drawingml/2006/main">
               <a:ext uri="{FF2B5EF4-FFF2-40B4-BE49-F238E27FC236}">
-                <a16:creationId xmlns:a16="http://schemas.microsoft.com/office/drawing/2014/main" id="{B840E872-8AB7-4535-A333-744F28A21532}"/>
+                <a16:creationId xmlns:a16="http://schemas.microsoft.com/office/drawing/2014/main" id="{6CE79AC2-BAB3-43A4-A366-0D0FF3D5A10B}"/>
               </a:ext>
             </a:extLst>
           </p:cNvPr>
@@ -3470,7 +3470,7 @@
           <p:cNvPr id="5" name="">
             <a:extLst xmlns:a="http://schemas.openxmlformats.org/drawingml/2006/main">
               <a:ext uri="{FF2B5EF4-FFF2-40B4-BE49-F238E27FC236}">
-                <a16:creationId xmlns:a16="http://schemas.microsoft.com/office/drawing/2014/main" id="{4FF49364-A717-41CB-A31F-A2F652C495B9}"/>
+                <a16:creationId xmlns:a16="http://schemas.microsoft.com/office/drawing/2014/main" id="{B95B6F67-E00B-43C5-A193-8763B838AE1D}"/>
               </a:ext>
             </a:extLst>
           </p:cNvPr>
@@ -3527,7 +3527,7 @@
           <p:cNvPr id="6" name="">
             <a:extLst xmlns:a="http://schemas.openxmlformats.org/drawingml/2006/main">
               <a:ext uri="{FF2B5EF4-FFF2-40B4-BE49-F238E27FC236}">
-                <a16:creationId xmlns:a16="http://schemas.microsoft.com/office/drawing/2014/main" id="{5E1D28CB-0FE5-4641-A6A3-81387D4CA204}"/>
+                <a16:creationId xmlns:a16="http://schemas.microsoft.com/office/drawing/2014/main" id="{199BAE22-AA57-4140-B623-01906913A561}"/>
               </a:ext>
             </a:extLst>
           </p:cNvPr>
@@ -3584,7 +3584,7 @@
           <p:cNvPr id="7" name="">
             <a:extLst xmlns:a="http://schemas.openxmlformats.org/drawingml/2006/main">
               <a:ext uri="{FF2B5EF4-FFF2-40B4-BE49-F238E27FC236}">
-                <a16:creationId xmlns:a16="http://schemas.microsoft.com/office/drawing/2014/main" id="{94D1426E-A037-41CE-8E22-6B6289A6D512}"/>
+                <a16:creationId xmlns:a16="http://schemas.microsoft.com/office/drawing/2014/main" id="{4CAA68EA-BCE0-410D-9C93-7B817DBEFC69}"/>
               </a:ext>
             </a:extLst>
           </p:cNvPr>
@@ -3616,7 +3616,7 @@
           <p:cNvPr id="8" name="">
             <a:extLst xmlns:a="http://schemas.openxmlformats.org/drawingml/2006/main">
               <a:ext uri="{FF2B5EF4-FFF2-40B4-BE49-F238E27FC236}">
-                <a16:creationId xmlns:a16="http://schemas.microsoft.com/office/drawing/2014/main" id="{1CCDC821-9470-43E9-986B-24A4A939FEF2}"/>
+                <a16:creationId xmlns:a16="http://schemas.microsoft.com/office/drawing/2014/main" id="{3252EBAC-E77A-4196-B583-6509878A8408}"/>
               </a:ext>
             </a:extLst>
           </p:cNvPr>
@@ -3673,7 +3673,7 @@
           <p:cNvPr id="9" name="">
             <a:extLst xmlns:a="http://schemas.openxmlformats.org/drawingml/2006/main">
               <a:ext uri="{FF2B5EF4-FFF2-40B4-BE49-F238E27FC236}">
-                <a16:creationId xmlns:a16="http://schemas.microsoft.com/office/drawing/2014/main" id="{9D676436-5492-4FD7-8FDC-11F03A6FEBE2}"/>
+                <a16:creationId xmlns:a16="http://schemas.microsoft.com/office/drawing/2014/main" id="{BA141E5B-568C-45AC-9C2A-4B66004BA5C2}"/>
               </a:ext>
             </a:extLst>
           </p:cNvPr>
@@ -3730,7 +3730,7 @@
           <p:cNvPr id="10" name="">
             <a:extLst xmlns:a="http://schemas.openxmlformats.org/drawingml/2006/main">
               <a:ext uri="{FF2B5EF4-FFF2-40B4-BE49-F238E27FC236}">
-                <a16:creationId xmlns:a16="http://schemas.microsoft.com/office/drawing/2014/main" id="{D7FB1158-A5D6-4A7E-97C3-85A8F9CD92E6}"/>
+                <a16:creationId xmlns:a16="http://schemas.microsoft.com/office/drawing/2014/main" id="{E9559868-DCE5-4D61-9A29-DF79C97E712E}"/>
               </a:ext>
             </a:extLst>
           </p:cNvPr>
@@ -3787,7 +3787,7 @@
           <p:cNvPr id="11" name="">
             <a:extLst xmlns:a="http://schemas.openxmlformats.org/drawingml/2006/main">
               <a:ext uri="{FF2B5EF4-FFF2-40B4-BE49-F238E27FC236}">
-                <a16:creationId xmlns:a16="http://schemas.microsoft.com/office/drawing/2014/main" id="{3A7D8B6C-504D-4C75-8B09-C46B508B9C7C}"/>
+                <a16:creationId xmlns:a16="http://schemas.microsoft.com/office/drawing/2014/main" id="{5F47BDA6-C8F0-4ACA-B33D-D70FEE51E914}"/>
               </a:ext>
             </a:extLst>
           </p:cNvPr>
@@ -3821,7 +3821,7 @@
           <p:cNvPr id="12" name="">
             <a:extLst xmlns:a="http://schemas.openxmlformats.org/drawingml/2006/main">
               <a:ext uri="{FF2B5EF4-FFF2-40B4-BE49-F238E27FC236}">
-                <a16:creationId xmlns:a16="http://schemas.microsoft.com/office/drawing/2014/main" id="{CC2016A0-1DA7-40E3-AF44-14C17DD253D7}"/>
+                <a16:creationId xmlns:a16="http://schemas.microsoft.com/office/drawing/2014/main" id="{A380A367-6044-4FDA-9000-82DCC23242AC}"/>
               </a:ext>
             </a:extLst>
           </p:cNvPr>
@@ -3878,7 +3878,7 @@
           <p:cNvPr id="13" name="">
             <a:extLst xmlns:a="http://schemas.openxmlformats.org/drawingml/2006/main">
               <a:ext uri="{FF2B5EF4-FFF2-40B4-BE49-F238E27FC236}">
-                <a16:creationId xmlns:a16="http://schemas.microsoft.com/office/drawing/2014/main" id="{BE71D7D8-C1ED-4663-865E-FEF6B86CBD6E}"/>
+                <a16:creationId xmlns:a16="http://schemas.microsoft.com/office/drawing/2014/main" id="{A2ED0448-ECC5-43D7-AEAC-449762DF95A1}"/>
               </a:ext>
             </a:extLst>
           </p:cNvPr>
@@ -3935,7 +3935,7 @@
           <p:cNvPr id="14" name="">
             <a:extLst xmlns:a="http://schemas.openxmlformats.org/drawingml/2006/main">
               <a:ext uri="{FF2B5EF4-FFF2-40B4-BE49-F238E27FC236}">
-                <a16:creationId xmlns:a16="http://schemas.microsoft.com/office/drawing/2014/main" id="{AEE41BBD-4529-4A16-8572-88926FC3E184}"/>
+                <a16:creationId xmlns:a16="http://schemas.microsoft.com/office/drawing/2014/main" id="{A8F8294D-B47F-45A0-87B4-30A202B0D01D}"/>
               </a:ext>
             </a:extLst>
           </p:cNvPr>
@@ -3992,7 +3992,7 @@
           <p:cNvPr id="15" name="">
             <a:extLst xmlns:a="http://schemas.openxmlformats.org/drawingml/2006/main">
               <a:ext uri="{FF2B5EF4-FFF2-40B4-BE49-F238E27FC236}">
-                <a16:creationId xmlns:a16="http://schemas.microsoft.com/office/drawing/2014/main" id="{39CC602D-D5AC-45F6-9EE8-80AE1F218E70}"/>
+                <a16:creationId xmlns:a16="http://schemas.microsoft.com/office/drawing/2014/main" id="{FBD76A0F-3FF2-427D-BC6A-9DCB5064C4F2}"/>
               </a:ext>
             </a:extLst>
           </p:cNvPr>
@@ -4026,7 +4026,7 @@
           <p:cNvPr id="16" name="">
             <a:extLst xmlns:a="http://schemas.openxmlformats.org/drawingml/2006/main">
               <a:ext uri="{FF2B5EF4-FFF2-40B4-BE49-F238E27FC236}">
-                <a16:creationId xmlns:a16="http://schemas.microsoft.com/office/drawing/2014/main" id="{E99ED31F-6875-457F-A308-3FE698C0BBB2}"/>
+                <a16:creationId xmlns:a16="http://schemas.microsoft.com/office/drawing/2014/main" id="{3BCA8F53-FDE8-42BD-A86E-2CAA6CC17141}"/>
               </a:ext>
             </a:extLst>
           </p:cNvPr>
@@ -4083,7 +4083,7 @@
           <p:cNvPr id="17" name="">
             <a:extLst xmlns:a="http://schemas.openxmlformats.org/drawingml/2006/main">
               <a:ext uri="{FF2B5EF4-FFF2-40B4-BE49-F238E27FC236}">
-                <a16:creationId xmlns:a16="http://schemas.microsoft.com/office/drawing/2014/main" id="{3F624BEF-908F-4396-8CEA-2037AA13526F}"/>
+                <a16:creationId xmlns:a16="http://schemas.microsoft.com/office/drawing/2014/main" id="{3DC4524D-54A7-4BA3-9854-AA9C99128CFA}"/>
               </a:ext>
             </a:extLst>
           </p:cNvPr>
@@ -4140,7 +4140,7 @@
           <p:cNvPr id="18" name="">
             <a:extLst xmlns:a="http://schemas.openxmlformats.org/drawingml/2006/main">
               <a:ext uri="{FF2B5EF4-FFF2-40B4-BE49-F238E27FC236}">
-                <a16:creationId xmlns:a16="http://schemas.microsoft.com/office/drawing/2014/main" id="{12DD9264-1A18-4E40-AB1D-183BC10A106A}"/>
+                <a16:creationId xmlns:a16="http://schemas.microsoft.com/office/drawing/2014/main" id="{147AF16D-4DB6-459A-A0DE-9D9BA8ED175E}"/>
               </a:ext>
             </a:extLst>
           </p:cNvPr>
@@ -4195,7 +4195,7 @@
     </p:spTree>
     <p:extLst>
       <p:ext uri="{BB962C8B-B14F-4D97-AF65-F5344CB8AC3E}">
-        <p14:creationId xmlns:p14="http://schemas.microsoft.com/office/powerpoint/2010/main" val="1726602435"/>
+        <p14:creationId xmlns:p14="http://schemas.microsoft.com/office/powerpoint/2010/main" val="1158827587"/>
       </p:ext>
     </p:extLst>
   </p:cSld>
@@ -4350,7 +4350,7 @@
           <p:cNvPr id="23" name="">
             <a:extLst xmlns:a="http://schemas.openxmlformats.org/drawingml/2006/main">
               <a:ext uri="{FF2B5EF4-FFF2-40B4-BE49-F238E27FC236}">
-                <a16:creationId xmlns:a16="http://schemas.microsoft.com/office/drawing/2014/main" id="{469F4E93-35E6-40D0-8411-DA9BBE7825DE}"/>
+                <a16:creationId xmlns:a16="http://schemas.microsoft.com/office/drawing/2014/main" id="{8618084A-B968-40D1-8875-3CED1C6D2B1D}"/>
               </a:ext>
             </a:extLst>
           </p:cNvPr>
@@ -4382,7 +4382,7 @@
           <p:cNvPr id="2" name="">
             <a:extLst xmlns:a="http://schemas.openxmlformats.org/drawingml/2006/main">
               <a:ext uri="{FF2B5EF4-FFF2-40B4-BE49-F238E27FC236}">
-                <a16:creationId xmlns:a16="http://schemas.microsoft.com/office/drawing/2014/main" id="{4B427175-8B0D-4EE9-8FA3-B8DC5C200D29}"/>
+                <a16:creationId xmlns:a16="http://schemas.microsoft.com/office/drawing/2014/main" id="{05BEE429-9E3E-45D5-B1AB-B79CAFF50800}"/>
               </a:ext>
             </a:extLst>
           </p:cNvPr>
@@ -4439,7 +4439,7 @@
           <p:cNvPr id="3" name="">
             <a:extLst xmlns:a="http://schemas.openxmlformats.org/drawingml/2006/main">
               <a:ext uri="{FF2B5EF4-FFF2-40B4-BE49-F238E27FC236}">
-                <a16:creationId xmlns:a16="http://schemas.microsoft.com/office/drawing/2014/main" id="{428FA9C8-AF2C-415D-B894-E46761946634}"/>
+                <a16:creationId xmlns:a16="http://schemas.microsoft.com/office/drawing/2014/main" id="{A5BBC51D-CB6E-4585-B938-3CF0C38661F0}"/>
               </a:ext>
             </a:extLst>
           </p:cNvPr>
@@ -4471,7 +4471,7 @@
           <p:cNvPr id="4" name="">
             <a:extLst xmlns:a="http://schemas.openxmlformats.org/drawingml/2006/main">
               <a:ext uri="{FF2B5EF4-FFF2-40B4-BE49-F238E27FC236}">
-                <a16:creationId xmlns:a16="http://schemas.microsoft.com/office/drawing/2014/main" id="{4A88945B-2236-498C-80E8-BBB8ED63553A}"/>
+                <a16:creationId xmlns:a16="http://schemas.microsoft.com/office/drawing/2014/main" id="{F6F173BD-7E84-4F46-8CE3-702CCF77A812}"/>
               </a:ext>
             </a:extLst>
           </p:cNvPr>
@@ -4528,7 +4528,7 @@
           <p:cNvPr id="5" name="">
             <a:extLst xmlns:a="http://schemas.openxmlformats.org/drawingml/2006/main">
               <a:ext uri="{FF2B5EF4-FFF2-40B4-BE49-F238E27FC236}">
-                <a16:creationId xmlns:a16="http://schemas.microsoft.com/office/drawing/2014/main" id="{5505A666-36AE-43B5-B232-7686A715B615}"/>
+                <a16:creationId xmlns:a16="http://schemas.microsoft.com/office/drawing/2014/main" id="{1F986E78-DB50-46F2-8A84-D2B14C1BAD3F}"/>
               </a:ext>
             </a:extLst>
           </p:cNvPr>
@@ -4585,7 +4585,7 @@
           <p:cNvPr id="6" name="">
             <a:extLst xmlns:a="http://schemas.openxmlformats.org/drawingml/2006/main">
               <a:ext uri="{FF2B5EF4-FFF2-40B4-BE49-F238E27FC236}">
-                <a16:creationId xmlns:a16="http://schemas.microsoft.com/office/drawing/2014/main" id="{E3990EC6-D8CE-486C-A6A1-8950A8FE9964}"/>
+                <a16:creationId xmlns:a16="http://schemas.microsoft.com/office/drawing/2014/main" id="{E1387BB2-C8BB-48D1-BAA8-6788182FE348}"/>
               </a:ext>
             </a:extLst>
           </p:cNvPr>
@@ -4642,7 +4642,7 @@
           <p:cNvPr id="7" name="">
             <a:extLst xmlns:a="http://schemas.openxmlformats.org/drawingml/2006/main">
               <a:ext uri="{FF2B5EF4-FFF2-40B4-BE49-F238E27FC236}">
-                <a16:creationId xmlns:a16="http://schemas.microsoft.com/office/drawing/2014/main" id="{671A41CF-27CE-4274-B27B-D4618D9C4796}"/>
+                <a16:creationId xmlns:a16="http://schemas.microsoft.com/office/drawing/2014/main" id="{B7D73615-CCC3-43D5-BB42-219D4AC7DA19}"/>
               </a:ext>
             </a:extLst>
           </p:cNvPr>
@@ -4674,7 +4674,7 @@
           <p:cNvPr id="8" name="">
             <a:extLst xmlns:a="http://schemas.openxmlformats.org/drawingml/2006/main">
               <a:ext uri="{FF2B5EF4-FFF2-40B4-BE49-F238E27FC236}">
-                <a16:creationId xmlns:a16="http://schemas.microsoft.com/office/drawing/2014/main" id="{EDA91744-3948-45B3-B92A-BE88F38FDC4B}"/>
+                <a16:creationId xmlns:a16="http://schemas.microsoft.com/office/drawing/2014/main" id="{D552887E-DB1A-4EDD-9306-E1C7D61D7A95}"/>
               </a:ext>
             </a:extLst>
           </p:cNvPr>
@@ -4731,7 +4731,7 @@
           <p:cNvPr id="9" name="">
             <a:extLst xmlns:a="http://schemas.openxmlformats.org/drawingml/2006/main">
               <a:ext uri="{FF2B5EF4-FFF2-40B4-BE49-F238E27FC236}">
-                <a16:creationId xmlns:a16="http://schemas.microsoft.com/office/drawing/2014/main" id="{0635D1AD-16DF-46CB-9592-DCD493BC29B1}"/>
+                <a16:creationId xmlns:a16="http://schemas.microsoft.com/office/drawing/2014/main" id="{CDF7A8B1-AA49-4855-AC3E-014155128250}"/>
               </a:ext>
             </a:extLst>
           </p:cNvPr>
@@ -4788,7 +4788,7 @@
           <p:cNvPr id="10" name="">
             <a:extLst xmlns:a="http://schemas.openxmlformats.org/drawingml/2006/main">
               <a:ext uri="{FF2B5EF4-FFF2-40B4-BE49-F238E27FC236}">
-                <a16:creationId xmlns:a16="http://schemas.microsoft.com/office/drawing/2014/main" id="{9E3C3AA6-A488-468E-A3A6-744CAF360533}"/>
+                <a16:creationId xmlns:a16="http://schemas.microsoft.com/office/drawing/2014/main" id="{79285C75-4BE9-4A08-980C-B59A3D995C32}"/>
               </a:ext>
             </a:extLst>
           </p:cNvPr>
@@ -4822,7 +4822,7 @@
           <p:cNvPr id="11" name="">
             <a:extLst xmlns:a="http://schemas.openxmlformats.org/drawingml/2006/main">
               <a:ext uri="{FF2B5EF4-FFF2-40B4-BE49-F238E27FC236}">
-                <a16:creationId xmlns:a16="http://schemas.microsoft.com/office/drawing/2014/main" id="{4A3F273F-6323-4F4F-959C-F8717F096D39}"/>
+                <a16:creationId xmlns:a16="http://schemas.microsoft.com/office/drawing/2014/main" id="{770EC071-CC87-4AA8-9F6C-24F0AAF41F47}"/>
               </a:ext>
             </a:extLst>
           </p:cNvPr>
@@ -4854,7 +4854,7 @@
           <p:cNvPr id="12" name="">
             <a:extLst xmlns:a="http://schemas.openxmlformats.org/drawingml/2006/main">
               <a:ext uri="{FF2B5EF4-FFF2-40B4-BE49-F238E27FC236}">
-                <a16:creationId xmlns:a16="http://schemas.microsoft.com/office/drawing/2014/main" id="{632360AB-2AA2-44C6-9E31-BE868CB82BF8}"/>
+                <a16:creationId xmlns:a16="http://schemas.microsoft.com/office/drawing/2014/main" id="{99A95577-E7C8-4CC8-A8F3-029DD34EBE14}"/>
               </a:ext>
             </a:extLst>
           </p:cNvPr>
@@ -4911,7 +4911,7 @@
           <p:cNvPr id="13" name="">
             <a:extLst xmlns:a="http://schemas.openxmlformats.org/drawingml/2006/main">
               <a:ext uri="{FF2B5EF4-FFF2-40B4-BE49-F238E27FC236}">
-                <a16:creationId xmlns:a16="http://schemas.microsoft.com/office/drawing/2014/main" id="{75C4D27A-2AB2-4413-9CC2-6250DCA42C05}"/>
+                <a16:creationId xmlns:a16="http://schemas.microsoft.com/office/drawing/2014/main" id="{63DBA4A1-2E45-4A09-8449-1F0112F74F9C}"/>
               </a:ext>
             </a:extLst>
           </p:cNvPr>
@@ -4968,7 +4968,7 @@
           <p:cNvPr id="14" name="">
             <a:extLst xmlns:a="http://schemas.openxmlformats.org/drawingml/2006/main">
               <a:ext uri="{FF2B5EF4-FFF2-40B4-BE49-F238E27FC236}">
-                <a16:creationId xmlns:a16="http://schemas.microsoft.com/office/drawing/2014/main" id="{ED858324-2171-4F3E-A4D3-29CFC5482B81}"/>
+                <a16:creationId xmlns:a16="http://schemas.microsoft.com/office/drawing/2014/main" id="{7CC8C0CF-BC6D-471B-B11E-4E5E037803B9}"/>
               </a:ext>
             </a:extLst>
           </p:cNvPr>
@@ -5002,7 +5002,7 @@
           <p:cNvPr id="15" name="">
             <a:extLst xmlns:a="http://schemas.openxmlformats.org/drawingml/2006/main">
               <a:ext uri="{FF2B5EF4-FFF2-40B4-BE49-F238E27FC236}">
-                <a16:creationId xmlns:a16="http://schemas.microsoft.com/office/drawing/2014/main" id="{28CFFD3F-58AA-4F65-BB50-ABBD47CE7B89}"/>
+                <a16:creationId xmlns:a16="http://schemas.microsoft.com/office/drawing/2014/main" id="{C698ABAA-A28E-4848-B5F1-B2C5671B359D}"/>
               </a:ext>
             </a:extLst>
           </p:cNvPr>
@@ -5034,7 +5034,7 @@
           <p:cNvPr id="16" name="">
             <a:extLst xmlns:a="http://schemas.openxmlformats.org/drawingml/2006/main">
               <a:ext uri="{FF2B5EF4-FFF2-40B4-BE49-F238E27FC236}">
-                <a16:creationId xmlns:a16="http://schemas.microsoft.com/office/drawing/2014/main" id="{FBE1F130-F2E6-49F2-8E92-CEEC16E633C9}"/>
+                <a16:creationId xmlns:a16="http://schemas.microsoft.com/office/drawing/2014/main" id="{8A9C488B-390C-4A34-A74A-68FEE9B3969C}"/>
               </a:ext>
             </a:extLst>
           </p:cNvPr>
@@ -5091,7 +5091,7 @@
           <p:cNvPr id="17" name="">
             <a:extLst xmlns:a="http://schemas.openxmlformats.org/drawingml/2006/main">
               <a:ext uri="{FF2B5EF4-FFF2-40B4-BE49-F238E27FC236}">
-                <a16:creationId xmlns:a16="http://schemas.microsoft.com/office/drawing/2014/main" id="{D874D52D-0D5C-42DB-B1CC-4A0E790AA060}"/>
+                <a16:creationId xmlns:a16="http://schemas.microsoft.com/office/drawing/2014/main" id="{9C305572-777D-4887-A379-9ED4B984BA51}"/>
               </a:ext>
             </a:extLst>
           </p:cNvPr>
@@ -5148,7 +5148,7 @@
           <p:cNvPr id="18" name="">
             <a:extLst xmlns:a="http://schemas.openxmlformats.org/drawingml/2006/main">
               <a:ext uri="{FF2B5EF4-FFF2-40B4-BE49-F238E27FC236}">
-                <a16:creationId xmlns:a16="http://schemas.microsoft.com/office/drawing/2014/main" id="{5BA8D17E-DFC0-40B1-8B3A-53D4DC3F4B0E}"/>
+                <a16:creationId xmlns:a16="http://schemas.microsoft.com/office/drawing/2014/main" id="{0C42AA3C-D77E-41AD-AA94-92F37EA099BF}"/>
               </a:ext>
             </a:extLst>
           </p:cNvPr>
@@ -5182,7 +5182,7 @@
           <p:cNvPr id="19" name="">
             <a:extLst xmlns:a="http://schemas.openxmlformats.org/drawingml/2006/main">
               <a:ext uri="{FF2B5EF4-FFF2-40B4-BE49-F238E27FC236}">
-                <a16:creationId xmlns:a16="http://schemas.microsoft.com/office/drawing/2014/main" id="{27B58AED-1D9D-48A6-B532-2DA9C21A550F}"/>
+                <a16:creationId xmlns:a16="http://schemas.microsoft.com/office/drawing/2014/main" id="{8C805D1D-E442-4662-82BC-F6B24EA0672C}"/>
               </a:ext>
             </a:extLst>
           </p:cNvPr>
@@ -5214,7 +5214,7 @@
           <p:cNvPr id="20" name="">
             <a:extLst xmlns:a="http://schemas.openxmlformats.org/drawingml/2006/main">
               <a:ext uri="{FF2B5EF4-FFF2-40B4-BE49-F238E27FC236}">
-                <a16:creationId xmlns:a16="http://schemas.microsoft.com/office/drawing/2014/main" id="{E3ED2A92-2AC5-462E-B13F-770CFE45D8AE}"/>
+                <a16:creationId xmlns:a16="http://schemas.microsoft.com/office/drawing/2014/main" id="{4981C820-8382-4D64-B777-3A9B89B4EFA4}"/>
               </a:ext>
             </a:extLst>
           </p:cNvPr>
@@ -5271,7 +5271,7 @@
           <p:cNvPr id="21" name="">
             <a:extLst xmlns:a="http://schemas.openxmlformats.org/drawingml/2006/main">
               <a:ext uri="{FF2B5EF4-FFF2-40B4-BE49-F238E27FC236}">
-                <a16:creationId xmlns:a16="http://schemas.microsoft.com/office/drawing/2014/main" id="{638EE11E-743E-45D1-82E2-3FC795F19353}"/>
+                <a16:creationId xmlns:a16="http://schemas.microsoft.com/office/drawing/2014/main" id="{E1E8D30F-94A3-4061-B968-1AAA243A178B}"/>
               </a:ext>
             </a:extLst>
           </p:cNvPr>
@@ -5328,7 +5328,7 @@
           <p:cNvPr id="22" name="">
             <a:extLst xmlns:a="http://schemas.openxmlformats.org/drawingml/2006/main">
               <a:ext uri="{FF2B5EF4-FFF2-40B4-BE49-F238E27FC236}">
-                <a16:creationId xmlns:a16="http://schemas.microsoft.com/office/drawing/2014/main" id="{9D76825F-0C79-4E44-86F0-AEB157E5FF30}"/>
+                <a16:creationId xmlns:a16="http://schemas.microsoft.com/office/drawing/2014/main" id="{238A02ED-0225-4810-AC4A-07BCBA7C240B}"/>
               </a:ext>
             </a:extLst>
           </p:cNvPr>
@@ -5383,7 +5383,7 @@
     </p:spTree>
     <p:extLst>
       <p:ext uri="{BB962C8B-B14F-4D97-AF65-F5344CB8AC3E}">
-        <p14:creationId xmlns:p14="http://schemas.microsoft.com/office/powerpoint/2010/main" val="1956394131"/>
+        <p14:creationId xmlns:p14="http://schemas.microsoft.com/office/powerpoint/2010/main" val="1630082418"/>
       </p:ext>
     </p:extLst>
   </p:cSld>
@@ -5584,7 +5584,7 @@
           <p:cNvPr id="23" name="">
             <a:extLst xmlns:a="http://schemas.openxmlformats.org/drawingml/2006/main">
               <a:ext uri="{FF2B5EF4-FFF2-40B4-BE49-F238E27FC236}">
-                <a16:creationId xmlns:a16="http://schemas.microsoft.com/office/drawing/2014/main" id="{8979F0BE-C138-4762-AC40-7F5790B65683}"/>
+                <a16:creationId xmlns:a16="http://schemas.microsoft.com/office/drawing/2014/main" id="{154E5242-7E5C-44E4-98FE-8D077AE009EC}"/>
               </a:ext>
             </a:extLst>
           </p:cNvPr>
@@ -5616,7 +5616,7 @@
           <p:cNvPr id="2" name="">
             <a:extLst xmlns:a="http://schemas.openxmlformats.org/drawingml/2006/main">
               <a:ext uri="{FF2B5EF4-FFF2-40B4-BE49-F238E27FC236}">
-                <a16:creationId xmlns:a16="http://schemas.microsoft.com/office/drawing/2014/main" id="{A9694056-9732-420D-ACD6-8F5E5514C03C}"/>
+                <a16:creationId xmlns:a16="http://schemas.microsoft.com/office/drawing/2014/main" id="{AF43415B-BE43-4248-A068-747B97C276FC}"/>
               </a:ext>
             </a:extLst>
           </p:cNvPr>
@@ -5673,7 +5673,7 @@
           <p:cNvPr id="3" name="">
             <a:extLst xmlns:a="http://schemas.openxmlformats.org/drawingml/2006/main">
               <a:ext uri="{FF2B5EF4-FFF2-40B4-BE49-F238E27FC236}">
-                <a16:creationId xmlns:a16="http://schemas.microsoft.com/office/drawing/2014/main" id="{E422DB60-1F0E-4861-A85A-537EF37262C3}"/>
+                <a16:creationId xmlns:a16="http://schemas.microsoft.com/office/drawing/2014/main" id="{72878B9E-80FA-4ECE-9D70-E21BE2483A9E}"/>
               </a:ext>
             </a:extLst>
           </p:cNvPr>
@@ -5705,7 +5705,7 @@
           <p:cNvPr id="4" name="">
             <a:extLst xmlns:a="http://schemas.openxmlformats.org/drawingml/2006/main">
               <a:ext uri="{FF2B5EF4-FFF2-40B4-BE49-F238E27FC236}">
-                <a16:creationId xmlns:a16="http://schemas.microsoft.com/office/drawing/2014/main" id="{55A86F3A-4075-476F-8AAD-9CCD2AF7B083}"/>
+                <a16:creationId xmlns:a16="http://schemas.microsoft.com/office/drawing/2014/main" id="{D56FD001-32C3-4B99-AECE-FB2B60D14BB1}"/>
               </a:ext>
             </a:extLst>
           </p:cNvPr>
@@ -5762,7 +5762,7 @@
           <p:cNvPr id="5" name="">
             <a:extLst xmlns:a="http://schemas.openxmlformats.org/drawingml/2006/main">
               <a:ext uri="{FF2B5EF4-FFF2-40B4-BE49-F238E27FC236}">
-                <a16:creationId xmlns:a16="http://schemas.microsoft.com/office/drawing/2014/main" id="{F2372C50-925F-48F6-B6A8-CB1C249B7B81}"/>
+                <a16:creationId xmlns:a16="http://schemas.microsoft.com/office/drawing/2014/main" id="{AADFEC98-933B-4429-8BAE-E2EE91F76785}"/>
               </a:ext>
             </a:extLst>
           </p:cNvPr>
@@ -5819,7 +5819,7 @@
           <p:cNvPr id="6" name="">
             <a:extLst xmlns:a="http://schemas.openxmlformats.org/drawingml/2006/main">
               <a:ext uri="{FF2B5EF4-FFF2-40B4-BE49-F238E27FC236}">
-                <a16:creationId xmlns:a16="http://schemas.microsoft.com/office/drawing/2014/main" id="{EE07FF85-5E85-4A44-9648-5F3B6326AA83}"/>
+                <a16:creationId xmlns:a16="http://schemas.microsoft.com/office/drawing/2014/main" id="{06CF8D91-D1E3-4F37-87D3-DDA57AACB45E}"/>
               </a:ext>
             </a:extLst>
           </p:cNvPr>
@@ -5876,7 +5876,7 @@
           <p:cNvPr id="7" name="">
             <a:extLst xmlns:a="http://schemas.openxmlformats.org/drawingml/2006/main">
               <a:ext uri="{FF2B5EF4-FFF2-40B4-BE49-F238E27FC236}">
-                <a16:creationId xmlns:a16="http://schemas.microsoft.com/office/drawing/2014/main" id="{878425AA-B626-4BD6-AA07-2A82C460D6FD}"/>
+                <a16:creationId xmlns:a16="http://schemas.microsoft.com/office/drawing/2014/main" id="{96E14B7C-CC0F-4659-A6EC-6508E83C586A}"/>
               </a:ext>
             </a:extLst>
           </p:cNvPr>
@@ -5908,7 +5908,7 @@
           <p:cNvPr id="8" name="">
             <a:extLst xmlns:a="http://schemas.openxmlformats.org/drawingml/2006/main">
               <a:ext uri="{FF2B5EF4-FFF2-40B4-BE49-F238E27FC236}">
-                <a16:creationId xmlns:a16="http://schemas.microsoft.com/office/drawing/2014/main" id="{94B10C15-1D71-4062-8898-0958F688976E}"/>
+                <a16:creationId xmlns:a16="http://schemas.microsoft.com/office/drawing/2014/main" id="{8FFFFF6A-F37C-426F-8A9E-A2239E0B3066}"/>
               </a:ext>
             </a:extLst>
           </p:cNvPr>
@@ -5965,7 +5965,7 @@
           <p:cNvPr id="9" name="">
             <a:extLst xmlns:a="http://schemas.openxmlformats.org/drawingml/2006/main">
               <a:ext uri="{FF2B5EF4-FFF2-40B4-BE49-F238E27FC236}">
-                <a16:creationId xmlns:a16="http://schemas.microsoft.com/office/drawing/2014/main" id="{B192739A-0D11-4474-A7D7-2001A08BE4F0}"/>
+                <a16:creationId xmlns:a16="http://schemas.microsoft.com/office/drawing/2014/main" id="{50078B34-AC98-4D04-928E-5A03B48844D3}"/>
               </a:ext>
             </a:extLst>
           </p:cNvPr>
@@ -6022,7 +6022,7 @@
           <p:cNvPr id="10" name="">
             <a:extLst xmlns:a="http://schemas.openxmlformats.org/drawingml/2006/main">
               <a:ext uri="{FF2B5EF4-FFF2-40B4-BE49-F238E27FC236}">
-                <a16:creationId xmlns:a16="http://schemas.microsoft.com/office/drawing/2014/main" id="{1769C75C-F12D-4AEF-8B1C-9514EF55612C}"/>
+                <a16:creationId xmlns:a16="http://schemas.microsoft.com/office/drawing/2014/main" id="{88959610-DEC4-4BB5-8DC6-DC8992FB10FE}"/>
               </a:ext>
             </a:extLst>
           </p:cNvPr>
@@ -6056,7 +6056,7 @@
           <p:cNvPr id="11" name="">
             <a:extLst xmlns:a="http://schemas.openxmlformats.org/drawingml/2006/main">
               <a:ext uri="{FF2B5EF4-FFF2-40B4-BE49-F238E27FC236}">
-                <a16:creationId xmlns:a16="http://schemas.microsoft.com/office/drawing/2014/main" id="{2573F608-05BE-42CB-80D5-CE39FD88E55E}"/>
+                <a16:creationId xmlns:a16="http://schemas.microsoft.com/office/drawing/2014/main" id="{5C05EC53-8D8F-4A28-BD8B-7556144C1897}"/>
               </a:ext>
             </a:extLst>
           </p:cNvPr>
@@ -6088,7 +6088,7 @@
           <p:cNvPr id="12" name="">
             <a:extLst xmlns:a="http://schemas.openxmlformats.org/drawingml/2006/main">
               <a:ext uri="{FF2B5EF4-FFF2-40B4-BE49-F238E27FC236}">
-                <a16:creationId xmlns:a16="http://schemas.microsoft.com/office/drawing/2014/main" id="{8BAB0727-5827-4DEC-86CB-8881F0E98401}"/>
+                <a16:creationId xmlns:a16="http://schemas.microsoft.com/office/drawing/2014/main" id="{8DAD8ECE-41CC-4462-899B-4C32DB9640EC}"/>
               </a:ext>
             </a:extLst>
           </p:cNvPr>
@@ -6145,7 +6145,7 @@
           <p:cNvPr id="13" name="">
             <a:extLst xmlns:a="http://schemas.openxmlformats.org/drawingml/2006/main">
               <a:ext uri="{FF2B5EF4-FFF2-40B4-BE49-F238E27FC236}">
-                <a16:creationId xmlns:a16="http://schemas.microsoft.com/office/drawing/2014/main" id="{9D540ADD-5DFC-49A3-9960-812A538E5AA4}"/>
+                <a16:creationId xmlns:a16="http://schemas.microsoft.com/office/drawing/2014/main" id="{F1CAAEF0-F633-4369-B379-D61565E0D9E8}"/>
               </a:ext>
             </a:extLst>
           </p:cNvPr>
@@ -6202,7 +6202,7 @@
           <p:cNvPr id="14" name="">
             <a:extLst xmlns:a="http://schemas.openxmlformats.org/drawingml/2006/main">
               <a:ext uri="{FF2B5EF4-FFF2-40B4-BE49-F238E27FC236}">
-                <a16:creationId xmlns:a16="http://schemas.microsoft.com/office/drawing/2014/main" id="{28E3B84F-7273-4283-AC26-C7D295C16C9B}"/>
+                <a16:creationId xmlns:a16="http://schemas.microsoft.com/office/drawing/2014/main" id="{67D7D89F-DB9D-4AA7-9F37-2AB6B227EADB}"/>
               </a:ext>
             </a:extLst>
           </p:cNvPr>
@@ -6236,7 +6236,7 @@
           <p:cNvPr id="15" name="">
             <a:extLst xmlns:a="http://schemas.openxmlformats.org/drawingml/2006/main">
               <a:ext uri="{FF2B5EF4-FFF2-40B4-BE49-F238E27FC236}">
-                <a16:creationId xmlns:a16="http://schemas.microsoft.com/office/drawing/2014/main" id="{2BA25E71-0278-425F-9686-22EFEBB38F58}"/>
+                <a16:creationId xmlns:a16="http://schemas.microsoft.com/office/drawing/2014/main" id="{4035636F-51D8-4BAD-A13F-69D1B0C16B38}"/>
               </a:ext>
             </a:extLst>
           </p:cNvPr>
@@ -6268,7 +6268,7 @@
           <p:cNvPr id="16" name="">
             <a:extLst xmlns:a="http://schemas.openxmlformats.org/drawingml/2006/main">
               <a:ext uri="{FF2B5EF4-FFF2-40B4-BE49-F238E27FC236}">
-                <a16:creationId xmlns:a16="http://schemas.microsoft.com/office/drawing/2014/main" id="{FC0E5C45-2972-470F-AC6F-A9A332F34899}"/>
+                <a16:creationId xmlns:a16="http://schemas.microsoft.com/office/drawing/2014/main" id="{1409F430-82F1-4834-93F1-86A4896B3001}"/>
               </a:ext>
             </a:extLst>
           </p:cNvPr>
@@ -6325,7 +6325,7 @@
           <p:cNvPr id="17" name="">
             <a:extLst xmlns:a="http://schemas.openxmlformats.org/drawingml/2006/main">
               <a:ext uri="{FF2B5EF4-FFF2-40B4-BE49-F238E27FC236}">
-                <a16:creationId xmlns:a16="http://schemas.microsoft.com/office/drawing/2014/main" id="{9A5E5F2C-3124-4181-A7B1-AD8D85753110}"/>
+                <a16:creationId xmlns:a16="http://schemas.microsoft.com/office/drawing/2014/main" id="{C24D44E6-4F8E-4FEE-8868-30786655F48B}"/>
               </a:ext>
             </a:extLst>
           </p:cNvPr>
@@ -6382,7 +6382,7 @@
           <p:cNvPr id="18" name="">
             <a:extLst xmlns:a="http://schemas.openxmlformats.org/drawingml/2006/main">
               <a:ext uri="{FF2B5EF4-FFF2-40B4-BE49-F238E27FC236}">
-                <a16:creationId xmlns:a16="http://schemas.microsoft.com/office/drawing/2014/main" id="{7307681A-BF65-41FB-B60B-96AC5F9975BD}"/>
+                <a16:creationId xmlns:a16="http://schemas.microsoft.com/office/drawing/2014/main" id="{D0040EEA-01C5-4F3A-BC2B-F414107E8EAA}"/>
               </a:ext>
             </a:extLst>
           </p:cNvPr>
@@ -6416,7 +6416,7 @@
           <p:cNvPr id="19" name="">
             <a:extLst xmlns:a="http://schemas.openxmlformats.org/drawingml/2006/main">
               <a:ext uri="{FF2B5EF4-FFF2-40B4-BE49-F238E27FC236}">
-                <a16:creationId xmlns:a16="http://schemas.microsoft.com/office/drawing/2014/main" id="{B4ED9B86-A872-40C0-8112-4A5563C20D1C}"/>
+                <a16:creationId xmlns:a16="http://schemas.microsoft.com/office/drawing/2014/main" id="{6D8C00A8-2738-447C-BF25-9C6A79626616}"/>
               </a:ext>
             </a:extLst>
           </p:cNvPr>
@@ -6448,7 +6448,7 @@
           <p:cNvPr id="20" name="">
             <a:extLst xmlns:a="http://schemas.openxmlformats.org/drawingml/2006/main">
               <a:ext uri="{FF2B5EF4-FFF2-40B4-BE49-F238E27FC236}">
-                <a16:creationId xmlns:a16="http://schemas.microsoft.com/office/drawing/2014/main" id="{B09FE3B1-0E8F-4CE0-BBEC-DC4FD767D241}"/>
+                <a16:creationId xmlns:a16="http://schemas.microsoft.com/office/drawing/2014/main" id="{C5B41624-4602-4A29-AA7D-17657BE050FB}"/>
               </a:ext>
             </a:extLst>
           </p:cNvPr>
@@ -6505,7 +6505,7 @@
           <p:cNvPr id="21" name="">
             <a:extLst xmlns:a="http://schemas.openxmlformats.org/drawingml/2006/main">
               <a:ext uri="{FF2B5EF4-FFF2-40B4-BE49-F238E27FC236}">
-                <a16:creationId xmlns:a16="http://schemas.microsoft.com/office/drawing/2014/main" id="{A61404FE-948E-4054-9FD1-3A137E742E5F}"/>
+                <a16:creationId xmlns:a16="http://schemas.microsoft.com/office/drawing/2014/main" id="{F3DF1E38-5585-446D-BF19-FEF761E63F5C}"/>
               </a:ext>
             </a:extLst>
           </p:cNvPr>
@@ -6562,7 +6562,7 @@
           <p:cNvPr id="22" name="">
             <a:extLst xmlns:a="http://schemas.openxmlformats.org/drawingml/2006/main">
               <a:ext uri="{FF2B5EF4-FFF2-40B4-BE49-F238E27FC236}">
-                <a16:creationId xmlns:a16="http://schemas.microsoft.com/office/drawing/2014/main" id="{D07CC729-2148-4C41-A21D-30F064B83877}"/>
+                <a16:creationId xmlns:a16="http://schemas.microsoft.com/office/drawing/2014/main" id="{C749BAE1-0A46-421D-AA8E-54AE6A8A8774}"/>
               </a:ext>
             </a:extLst>
           </p:cNvPr>
@@ -6617,7 +6617,7 @@
     </p:spTree>
     <p:extLst>
       <p:ext uri="{BB962C8B-B14F-4D97-AF65-F5344CB8AC3E}">
-        <p14:creationId xmlns:p14="http://schemas.microsoft.com/office/powerpoint/2010/main" val="2102681761"/>
+        <p14:creationId xmlns:p14="http://schemas.microsoft.com/office/powerpoint/2010/main" val="349070971"/>
       </p:ext>
     </p:extLst>
   </p:cSld>
@@ -6818,7 +6818,7 @@
           <p:cNvPr id="16" name="">
             <a:extLst xmlns:a="http://schemas.openxmlformats.org/drawingml/2006/main">
               <a:ext uri="{FF2B5EF4-FFF2-40B4-BE49-F238E27FC236}">
-                <a16:creationId xmlns:a16="http://schemas.microsoft.com/office/drawing/2014/main" id="{CAF85DE0-1717-4893-9E63-583EFBDA8092}"/>
+                <a16:creationId xmlns:a16="http://schemas.microsoft.com/office/drawing/2014/main" id="{C3988B91-7429-4354-A693-4280CB19400D}"/>
               </a:ext>
             </a:extLst>
           </p:cNvPr>
@@ -6850,7 +6850,7 @@
           <p:cNvPr id="2" name="">
             <a:extLst xmlns:a="http://schemas.openxmlformats.org/drawingml/2006/main">
               <a:ext uri="{FF2B5EF4-FFF2-40B4-BE49-F238E27FC236}">
-                <a16:creationId xmlns:a16="http://schemas.microsoft.com/office/drawing/2014/main" id="{66EC5AA0-6E77-4F6E-9B0F-75FB89F58008}"/>
+                <a16:creationId xmlns:a16="http://schemas.microsoft.com/office/drawing/2014/main" id="{EBFEEDA8-5789-4F2D-8282-733F2B6FD6AD}"/>
               </a:ext>
             </a:extLst>
           </p:cNvPr>
@@ -6907,7 +6907,7 @@
           <p:cNvPr id="3" name="">
             <a:extLst xmlns:a="http://schemas.openxmlformats.org/drawingml/2006/main">
               <a:ext uri="{FF2B5EF4-FFF2-40B4-BE49-F238E27FC236}">
-                <a16:creationId xmlns:a16="http://schemas.microsoft.com/office/drawing/2014/main" id="{6D44BEE1-65C4-40B3-972A-8C6E6C5D1FA8}"/>
+                <a16:creationId xmlns:a16="http://schemas.microsoft.com/office/drawing/2014/main" id="{92F90B12-90BC-4BA5-A268-BA2856B64446}"/>
               </a:ext>
             </a:extLst>
           </p:cNvPr>
@@ -6939,7 +6939,7 @@
           <p:cNvPr id="4" name="">
             <a:extLst xmlns:a="http://schemas.openxmlformats.org/drawingml/2006/main">
               <a:ext uri="{FF2B5EF4-FFF2-40B4-BE49-F238E27FC236}">
-                <a16:creationId xmlns:a16="http://schemas.microsoft.com/office/drawing/2014/main" id="{5A7B18B5-6A42-443C-A696-8ACC7106C2BE}"/>
+                <a16:creationId xmlns:a16="http://schemas.microsoft.com/office/drawing/2014/main" id="{86234DF4-6AB6-41E7-8723-D3C01E8BB676}"/>
               </a:ext>
             </a:extLst>
           </p:cNvPr>
@@ -6996,7 +6996,7 @@
           <p:cNvPr id="5" name="">
             <a:extLst xmlns:a="http://schemas.openxmlformats.org/drawingml/2006/main">
               <a:ext uri="{FF2B5EF4-FFF2-40B4-BE49-F238E27FC236}">
-                <a16:creationId xmlns:a16="http://schemas.microsoft.com/office/drawing/2014/main" id="{23D9C8C5-7FC1-4833-A268-6E0A8D18C04F}"/>
+                <a16:creationId xmlns:a16="http://schemas.microsoft.com/office/drawing/2014/main" id="{093E9B0F-8A8F-4183-9433-EB14EA7A2EC9}"/>
               </a:ext>
             </a:extLst>
           </p:cNvPr>
@@ -7053,7 +7053,7 @@
           <p:cNvPr id="6" name="">
             <a:extLst xmlns:a="http://schemas.openxmlformats.org/drawingml/2006/main">
               <a:ext uri="{FF2B5EF4-FFF2-40B4-BE49-F238E27FC236}">
-                <a16:creationId xmlns:a16="http://schemas.microsoft.com/office/drawing/2014/main" id="{B2CB9801-5169-4B77-BA08-928EEF58270B}"/>
+                <a16:creationId xmlns:a16="http://schemas.microsoft.com/office/drawing/2014/main" id="{77A026CA-22B6-42E7-B622-31DD65E541FD}"/>
               </a:ext>
             </a:extLst>
           </p:cNvPr>
@@ -7110,7 +7110,7 @@
           <p:cNvPr id="7" name="">
             <a:extLst xmlns:a="http://schemas.openxmlformats.org/drawingml/2006/main">
               <a:ext uri="{FF2B5EF4-FFF2-40B4-BE49-F238E27FC236}">
-                <a16:creationId xmlns:a16="http://schemas.microsoft.com/office/drawing/2014/main" id="{A825CF76-4C42-40CA-8409-4EC3778860FE}"/>
+                <a16:creationId xmlns:a16="http://schemas.microsoft.com/office/drawing/2014/main" id="{30B6A72B-0F34-476B-9FF7-3F2CD5D87AE0}"/>
               </a:ext>
             </a:extLst>
           </p:cNvPr>
@@ -7142,7 +7142,7 @@
           <p:cNvPr id="8" name="">
             <a:extLst xmlns:a="http://schemas.openxmlformats.org/drawingml/2006/main">
               <a:ext uri="{FF2B5EF4-FFF2-40B4-BE49-F238E27FC236}">
-                <a16:creationId xmlns:a16="http://schemas.microsoft.com/office/drawing/2014/main" id="{1C276010-65AD-43B1-A082-FD3C7F7C64BD}"/>
+                <a16:creationId xmlns:a16="http://schemas.microsoft.com/office/drawing/2014/main" id="{D5D1D031-88F3-488D-9AE8-5C5C122C8C30}"/>
               </a:ext>
             </a:extLst>
           </p:cNvPr>
@@ -7199,7 +7199,7 @@
           <p:cNvPr id="9" name="">
             <a:extLst xmlns:a="http://schemas.openxmlformats.org/drawingml/2006/main">
               <a:ext uri="{FF2B5EF4-FFF2-40B4-BE49-F238E27FC236}">
-                <a16:creationId xmlns:a16="http://schemas.microsoft.com/office/drawing/2014/main" id="{8FBF8687-B2F9-47CA-A414-AD8C236DEB0C}"/>
+                <a16:creationId xmlns:a16="http://schemas.microsoft.com/office/drawing/2014/main" id="{3BC817B6-DD8C-422A-9382-1845A954D7D1}"/>
               </a:ext>
             </a:extLst>
           </p:cNvPr>
@@ -7256,7 +7256,7 @@
           <p:cNvPr id="10" name="">
             <a:extLst xmlns:a="http://schemas.openxmlformats.org/drawingml/2006/main">
               <a:ext uri="{FF2B5EF4-FFF2-40B4-BE49-F238E27FC236}">
-                <a16:creationId xmlns:a16="http://schemas.microsoft.com/office/drawing/2014/main" id="{13E2F0B7-CD64-403B-AE14-A4577FCA7339}"/>
+                <a16:creationId xmlns:a16="http://schemas.microsoft.com/office/drawing/2014/main" id="{20FC38D7-BB07-4B08-9BF8-AC9C6EF8C073}"/>
               </a:ext>
             </a:extLst>
           </p:cNvPr>
@@ -7313,7 +7313,7 @@
           <p:cNvPr id="11" name="">
             <a:extLst xmlns:a="http://schemas.openxmlformats.org/drawingml/2006/main">
               <a:ext uri="{FF2B5EF4-FFF2-40B4-BE49-F238E27FC236}">
-                <a16:creationId xmlns:a16="http://schemas.microsoft.com/office/drawing/2014/main" id="{5472E765-6B84-4D40-8488-2FBC7D0D30B9}"/>
+                <a16:creationId xmlns:a16="http://schemas.microsoft.com/office/drawing/2014/main" id="{36D139E6-7ABD-4837-B38B-7D53C7B554A2}"/>
               </a:ext>
             </a:extLst>
           </p:cNvPr>
@@ -7345,7 +7345,7 @@
           <p:cNvPr id="12" name="">
             <a:extLst xmlns:a="http://schemas.openxmlformats.org/drawingml/2006/main">
               <a:ext uri="{FF2B5EF4-FFF2-40B4-BE49-F238E27FC236}">
-                <a16:creationId xmlns:a16="http://schemas.microsoft.com/office/drawing/2014/main" id="{1E760DEE-20F1-41E0-A3FF-1498D62B76D4}"/>
+                <a16:creationId xmlns:a16="http://schemas.microsoft.com/office/drawing/2014/main" id="{F52C2323-7208-4746-AD15-3B850976704E}"/>
               </a:ext>
             </a:extLst>
           </p:cNvPr>
@@ -7402,7 +7402,7 @@
           <p:cNvPr id="13" name="">
             <a:extLst xmlns:a="http://schemas.openxmlformats.org/drawingml/2006/main">
               <a:ext uri="{FF2B5EF4-FFF2-40B4-BE49-F238E27FC236}">
-                <a16:creationId xmlns:a16="http://schemas.microsoft.com/office/drawing/2014/main" id="{A862884E-CCE8-49AB-9D4D-151E6113A2C2}"/>
+                <a16:creationId xmlns:a16="http://schemas.microsoft.com/office/drawing/2014/main" id="{CC277CB1-ABB1-412F-A572-441F21190E88}"/>
               </a:ext>
             </a:extLst>
           </p:cNvPr>
@@ -7459,7 +7459,7 @@
           <p:cNvPr id="14" name="">
             <a:extLst xmlns:a="http://schemas.openxmlformats.org/drawingml/2006/main">
               <a:ext uri="{FF2B5EF4-FFF2-40B4-BE49-F238E27FC236}">
-                <a16:creationId xmlns:a16="http://schemas.microsoft.com/office/drawing/2014/main" id="{E37BC835-F2BB-44EB-A514-D5B38B1661C6}"/>
+                <a16:creationId xmlns:a16="http://schemas.microsoft.com/office/drawing/2014/main" id="{6ED3B0A0-4303-41B7-A7B2-52271813B3C0}"/>
               </a:ext>
             </a:extLst>
           </p:cNvPr>
@@ -7516,7 +7516,7 @@
           <p:cNvPr id="15" name="">
             <a:extLst xmlns:a="http://schemas.openxmlformats.org/drawingml/2006/main">
               <a:ext uri="{FF2B5EF4-FFF2-40B4-BE49-F238E27FC236}">
-                <a16:creationId xmlns:a16="http://schemas.microsoft.com/office/drawing/2014/main" id="{E50D9428-817A-4FF8-8F35-29901419BB64}"/>
+                <a16:creationId xmlns:a16="http://schemas.microsoft.com/office/drawing/2014/main" id="{B4F483D8-FFF0-47F1-B1D5-9CFA9DEC3BFF}"/>
               </a:ext>
             </a:extLst>
           </p:cNvPr>
@@ -7571,7 +7571,7 @@
     </p:spTree>
     <p:extLst>
       <p:ext uri="{BB962C8B-B14F-4D97-AF65-F5344CB8AC3E}">
-        <p14:creationId xmlns:p14="http://schemas.microsoft.com/office/powerpoint/2010/main" val="1522778280"/>
+        <p14:creationId xmlns:p14="http://schemas.microsoft.com/office/powerpoint/2010/main" val="1782442120"/>
       </p:ext>
     </p:extLst>
   </p:cSld>
@@ -7769,10 +7769,10 @@
       </p:grpSpPr>
       <p:sp>
         <p:nvSpPr>
-          <p:cNvPr id="23" name="">
-            <a:extLst xmlns:a="http://schemas.openxmlformats.org/drawingml/2006/main">
-              <a:ext uri="{FF2B5EF4-FFF2-40B4-BE49-F238E27FC236}">
-                <a16:creationId xmlns:a16="http://schemas.microsoft.com/office/drawing/2014/main" id="{7841E682-8F69-4526-A49A-DEA00FD72A87}"/>
+          <p:cNvPr id="26" name="">
+            <a:extLst xmlns:a="http://schemas.openxmlformats.org/drawingml/2006/main">
+              <a:ext uri="{FF2B5EF4-FFF2-40B4-BE49-F238E27FC236}">
+                <a16:creationId xmlns:a16="http://schemas.microsoft.com/office/drawing/2014/main" id="{AA8D66F1-3F2E-41DB-9818-EF0131D6D993}"/>
               </a:ext>
             </a:extLst>
           </p:cNvPr>
@@ -7804,7 +7804,7 @@
           <p:cNvPr id="2" name="">
             <a:extLst xmlns:a="http://schemas.openxmlformats.org/drawingml/2006/main">
               <a:ext uri="{FF2B5EF4-FFF2-40B4-BE49-F238E27FC236}">
-                <a16:creationId xmlns:a16="http://schemas.microsoft.com/office/drawing/2014/main" id="{F8512DB9-BB0B-4CEE-B675-503CD0F43A3E}"/>
+                <a16:creationId xmlns:a16="http://schemas.microsoft.com/office/drawing/2014/main" id="{F2410927-93F2-4E4A-A2A4-63DFD0B412D1}"/>
               </a:ext>
             </a:extLst>
           </p:cNvPr>
@@ -7861,7 +7861,7 @@
           <p:cNvPr id="3" name="">
             <a:extLst xmlns:a="http://schemas.openxmlformats.org/drawingml/2006/main">
               <a:ext uri="{FF2B5EF4-FFF2-40B4-BE49-F238E27FC236}">
-                <a16:creationId xmlns:a16="http://schemas.microsoft.com/office/drawing/2014/main" id="{A81F9F03-7E53-4C06-A5C9-53121AA636F8}"/>
+                <a16:creationId xmlns:a16="http://schemas.microsoft.com/office/drawing/2014/main" id="{72FE6423-5FC5-4A12-931A-B4ADEAEA1294}"/>
               </a:ext>
             </a:extLst>
           </p:cNvPr>
@@ -7893,7 +7893,7 @@
           <p:cNvPr id="4" name="">
             <a:extLst xmlns:a="http://schemas.openxmlformats.org/drawingml/2006/main">
               <a:ext uri="{FF2B5EF4-FFF2-40B4-BE49-F238E27FC236}">
-                <a16:creationId xmlns:a16="http://schemas.microsoft.com/office/drawing/2014/main" id="{CAA58769-5240-42A9-A0E1-81C817885938}"/>
+                <a16:creationId xmlns:a16="http://schemas.microsoft.com/office/drawing/2014/main" id="{EE24E019-5C92-419D-BAEC-DC476E6E3CDF}"/>
               </a:ext>
             </a:extLst>
           </p:cNvPr>
@@ -7950,7 +7950,7 @@
           <p:cNvPr id="5" name="">
             <a:extLst xmlns:a="http://schemas.openxmlformats.org/drawingml/2006/main">
               <a:ext uri="{FF2B5EF4-FFF2-40B4-BE49-F238E27FC236}">
-                <a16:creationId xmlns:a16="http://schemas.microsoft.com/office/drawing/2014/main" id="{CD77D176-9F17-4F42-A723-8830870C4790}"/>
+                <a16:creationId xmlns:a16="http://schemas.microsoft.com/office/drawing/2014/main" id="{66010595-FB9E-4376-B5D0-E1112F71493F}"/>
               </a:ext>
             </a:extLst>
           </p:cNvPr>
@@ -8007,7 +8007,7 @@
           <p:cNvPr id="6" name="">
             <a:extLst xmlns:a="http://schemas.openxmlformats.org/drawingml/2006/main">
               <a:ext uri="{FF2B5EF4-FFF2-40B4-BE49-F238E27FC236}">
-                <a16:creationId xmlns:a16="http://schemas.microsoft.com/office/drawing/2014/main" id="{31A345FD-D526-48D5-8260-B7015A3CFA80}"/>
+                <a16:creationId xmlns:a16="http://schemas.microsoft.com/office/drawing/2014/main" id="{843BE080-DB07-407F-88A7-592F5E1FDBF4}"/>
               </a:ext>
             </a:extLst>
           </p:cNvPr>
@@ -8064,7 +8064,7 @@
           <p:cNvPr id="7" name="">
             <a:extLst xmlns:a="http://schemas.openxmlformats.org/drawingml/2006/main">
               <a:ext uri="{FF2B5EF4-FFF2-40B4-BE49-F238E27FC236}">
-                <a16:creationId xmlns:a16="http://schemas.microsoft.com/office/drawing/2014/main" id="{17AA6FA3-9FBF-4220-B70C-46A3C09552E4}"/>
+                <a16:creationId xmlns:a16="http://schemas.microsoft.com/office/drawing/2014/main" id="{35149057-9295-486E-9CC0-2DADE1825B6C}"/>
               </a:ext>
             </a:extLst>
           </p:cNvPr>
@@ -8096,7 +8096,7 @@
           <p:cNvPr id="8" name="">
             <a:extLst xmlns:a="http://schemas.openxmlformats.org/drawingml/2006/main">
               <a:ext uri="{FF2B5EF4-FFF2-40B4-BE49-F238E27FC236}">
-                <a16:creationId xmlns:a16="http://schemas.microsoft.com/office/drawing/2014/main" id="{BC6628FF-71AE-46FF-9010-1E2FBA32C1F3}"/>
+                <a16:creationId xmlns:a16="http://schemas.microsoft.com/office/drawing/2014/main" id="{D5BC222D-531A-4050-BAB3-DE1216C07292}"/>
               </a:ext>
             </a:extLst>
           </p:cNvPr>
@@ -8153,7 +8153,7 @@
           <p:cNvPr id="9" name="">
             <a:extLst xmlns:a="http://schemas.openxmlformats.org/drawingml/2006/main">
               <a:ext uri="{FF2B5EF4-FFF2-40B4-BE49-F238E27FC236}">
-                <a16:creationId xmlns:a16="http://schemas.microsoft.com/office/drawing/2014/main" id="{015DA81A-2382-4BA2-88CC-3C1DB2D5BF5A}"/>
+                <a16:creationId xmlns:a16="http://schemas.microsoft.com/office/drawing/2014/main" id="{EA4FC3A6-1934-438A-A4C4-D8D44870BBD2}"/>
               </a:ext>
             </a:extLst>
           </p:cNvPr>
@@ -8210,19 +8210,19 @@
           <p:cNvPr id="10" name="">
             <a:extLst xmlns:a="http://schemas.openxmlformats.org/drawingml/2006/main">
               <a:ext uri="{FF2B5EF4-FFF2-40B4-BE49-F238E27FC236}">
-                <a16:creationId xmlns:a16="http://schemas.microsoft.com/office/drawing/2014/main" id="{CFE657AC-16B3-44E8-BF3B-5D46603ABBD5}"/>
-              </a:ext>
-            </a:extLst>
-          </p:cNvPr>
-          <p:cNvSpPr>
-            <a:spLocks xmlns:a="http://schemas.openxmlformats.org/drawingml/2006/main" noGrp="1"/>
-          </p:cNvSpPr>
-          <p:nvPr/>
-        </p:nvSpPr>
-        <p:spPr>
-          <a:xfrm xmlns:a="http://schemas.openxmlformats.org/drawingml/2006/main">
-            <a:off x="914400" y="1257300"/>
-            <a:ext cx="10363200" cy="781050"/>
+                <a16:creationId xmlns:a16="http://schemas.microsoft.com/office/drawing/2014/main" id="{3B3775F7-74C8-499F-9E9D-6C8CDFB66520}"/>
+              </a:ext>
+            </a:extLst>
+          </p:cNvPr>
+          <p:cNvSpPr>
+            <a:spLocks xmlns:a="http://schemas.openxmlformats.org/drawingml/2006/main" noGrp="1"/>
+          </p:cNvSpPr>
+          <p:nvPr/>
+        </p:nvSpPr>
+        <p:spPr>
+          <a:xfrm xmlns:a="http://schemas.openxmlformats.org/drawingml/2006/main">
+            <a:off x="857250" y="1219200"/>
+            <a:ext cx="10477500" cy="742950"/>
           </a:xfrm>
           <a:prstGeom xmlns:a="http://schemas.openxmlformats.org/drawingml/2006/main" prst="rect">
             <a:avLst/>
@@ -8239,7 +8239,7 @@
           <a:lstStyle xmlns:a="http://schemas.openxmlformats.org/drawingml/2006/main"/>
           <a:p xmlns:a="http://schemas.openxmlformats.org/drawingml/2006/main">
             <a:pPr algn="ctr">
-              <a:defRPr sz="2175" b="1">
+              <a:defRPr sz="2100" b="1">
                 <a:solidFill>
                   <a:srgbClr val="17253A"/>
                 </a:solidFill>
@@ -8249,7 +8249,7 @@
               </a:defRPr>
             </a:pPr>
             <a:r>
-              <a:rPr sz="2175" b="1">
+              <a:rPr sz="2100" b="1">
                 <a:solidFill>
                   <a:srgbClr val="17253A"/>
                 </a:solidFill>
@@ -8267,28 +8267,30 @@
           <p:cNvPr id="11" name="">
             <a:extLst xmlns:a="http://schemas.openxmlformats.org/drawingml/2006/main">
               <a:ext uri="{FF2B5EF4-FFF2-40B4-BE49-F238E27FC236}">
-                <a16:creationId xmlns:a16="http://schemas.microsoft.com/office/drawing/2014/main" id="{EEF410E7-F434-4F9A-911E-2E351F954ED9}"/>
-              </a:ext>
-            </a:extLst>
-          </p:cNvPr>
-          <p:cNvSpPr>
-            <a:spLocks xmlns:a="http://schemas.openxmlformats.org/drawingml/2006/main" noGrp="1"/>
-          </p:cNvSpPr>
-          <p:nvPr/>
-        </p:nvSpPr>
-        <p:spPr>
-          <a:xfrm xmlns:a="http://schemas.openxmlformats.org/drawingml/2006/main">
-            <a:off x="1000125" y="2247900"/>
-            <a:ext cx="476250" cy="476250"/>
-          </a:xfrm>
-          <a:prstGeom xmlns:a="http://schemas.openxmlformats.org/drawingml/2006/main" prst="ellipse">
+                <a16:creationId xmlns:a16="http://schemas.microsoft.com/office/drawing/2014/main" id="{F5A4C0CD-229E-4673-A2E1-D245A556A56A}"/>
+              </a:ext>
+            </a:extLst>
+          </p:cNvPr>
+          <p:cNvSpPr>
+            <a:spLocks xmlns:a="http://schemas.openxmlformats.org/drawingml/2006/main" noGrp="1"/>
+          </p:cNvSpPr>
+          <p:nvPr/>
+        </p:nvSpPr>
+        <p:spPr>
+          <a:xfrm xmlns:a="http://schemas.openxmlformats.org/drawingml/2006/main">
+            <a:off x="971550" y="2124075"/>
+            <a:ext cx="38100" cy="3524250"/>
+          </a:xfrm>
+          <a:prstGeom xmlns:a="http://schemas.openxmlformats.org/drawingml/2006/main" prst="rect">
             <a:avLst/>
           </a:prstGeom>
           <a:solidFill xmlns:a="http://schemas.openxmlformats.org/drawingml/2006/main">
-            <a:srgbClr val="18324A"/>
+            <a:srgbClr val="2C6E73"/>
           </a:solidFill>
           <a:ln xmlns:a="http://schemas.openxmlformats.org/drawingml/2006/main" w="0">
-            <a:noFill/>
+            <a:solidFill>
+              <a:srgbClr val="2C6E73"/>
+            </a:solidFill>
           </a:ln>
         </p:spPr>
       </p:sp>
@@ -8297,19 +8299,19 @@
           <p:cNvPr id="12" name="">
             <a:extLst xmlns:a="http://schemas.openxmlformats.org/drawingml/2006/main">
               <a:ext uri="{FF2B5EF4-FFF2-40B4-BE49-F238E27FC236}">
-                <a16:creationId xmlns:a16="http://schemas.microsoft.com/office/drawing/2014/main" id="{209DC3B5-918F-4514-A9ED-1CF4CB4688B6}"/>
-              </a:ext>
-            </a:extLst>
-          </p:cNvPr>
-          <p:cNvSpPr>
-            <a:spLocks xmlns:a="http://schemas.openxmlformats.org/drawingml/2006/main" noGrp="1"/>
-          </p:cNvSpPr>
-          <p:nvPr/>
-        </p:nvSpPr>
-        <p:spPr>
-          <a:xfrm xmlns:a="http://schemas.openxmlformats.org/drawingml/2006/main">
-            <a:off x="1000125" y="2276475"/>
-            <a:ext cx="476250" cy="419100"/>
+                <a16:creationId xmlns:a16="http://schemas.microsoft.com/office/drawing/2014/main" id="{0F7FBFF5-5283-40E5-BAE0-07CB94C53307}"/>
+              </a:ext>
+            </a:extLst>
+          </p:cNvPr>
+          <p:cNvSpPr>
+            <a:spLocks xmlns:a="http://schemas.openxmlformats.org/drawingml/2006/main" noGrp="1"/>
+          </p:cNvSpPr>
+          <p:nvPr/>
+        </p:nvSpPr>
+        <p:spPr>
+          <a:xfrm xmlns:a="http://schemas.openxmlformats.org/drawingml/2006/main">
+            <a:off x="1162050" y="2200275"/>
+            <a:ext cx="400050" cy="400050"/>
           </a:xfrm>
           <a:prstGeom xmlns:a="http://schemas.openxmlformats.org/drawingml/2006/main" prst="rect">
             <a:avLst/>
@@ -8326,9 +8328,9 @@
           <a:lstStyle xmlns:a="http://schemas.openxmlformats.org/drawingml/2006/main"/>
           <a:p xmlns:a="http://schemas.openxmlformats.org/drawingml/2006/main">
             <a:pPr algn="ctr">
-              <a:defRPr sz="1350" b="1">
-                <a:solidFill>
-                  <a:srgbClr val="FFFFFF"/>
+              <a:defRPr sz="1125" b="1">
+                <a:solidFill>
+                  <a:srgbClr val="2C6E73"/>
                 </a:solidFill>
                 <a:latin typeface="Arial"/>
                 <a:ea typeface="Arial"/>
@@ -8336,9 +8338,9 @@
               </a:defRPr>
             </a:pPr>
             <a:r>
-              <a:rPr sz="1350" b="1">
-                <a:solidFill>
-                  <a:srgbClr val="FFFFFF"/>
+              <a:rPr sz="1125" b="1">
+                <a:solidFill>
+                  <a:srgbClr val="2C6E73"/>
                 </a:solidFill>
                 <a:latin typeface="Arial"/>
                 <a:ea typeface="Arial"/>
@@ -8354,19 +8356,19 @@
           <p:cNvPr id="13" name="">
             <a:extLst xmlns:a="http://schemas.openxmlformats.org/drawingml/2006/main">
               <a:ext uri="{FF2B5EF4-FFF2-40B4-BE49-F238E27FC236}">
-                <a16:creationId xmlns:a16="http://schemas.microsoft.com/office/drawing/2014/main" id="{03A8422D-740D-4095-8A10-2715F712DE25}"/>
-              </a:ext>
-            </a:extLst>
-          </p:cNvPr>
-          <p:cNvSpPr>
-            <a:spLocks xmlns:a="http://schemas.openxmlformats.org/drawingml/2006/main" noGrp="1"/>
-          </p:cNvSpPr>
-          <p:nvPr/>
-        </p:nvSpPr>
-        <p:spPr>
-          <a:xfrm xmlns:a="http://schemas.openxmlformats.org/drawingml/2006/main">
-            <a:off x="1714500" y="2181225"/>
-            <a:ext cx="9429750" cy="609600"/>
+                <a16:creationId xmlns:a16="http://schemas.microsoft.com/office/drawing/2014/main" id="{7C6928BE-622E-4172-B362-6F014480123A}"/>
+              </a:ext>
+            </a:extLst>
+          </p:cNvPr>
+          <p:cNvSpPr>
+            <a:spLocks xmlns:a="http://schemas.openxmlformats.org/drawingml/2006/main" noGrp="1"/>
+          </p:cNvSpPr>
+          <p:nvPr/>
+        </p:nvSpPr>
+        <p:spPr>
+          <a:xfrm xmlns:a="http://schemas.openxmlformats.org/drawingml/2006/main">
+            <a:off x="1714500" y="2114550"/>
+            <a:ext cx="9525000" cy="638175"/>
           </a:xfrm>
           <a:prstGeom xmlns:a="http://schemas.openxmlformats.org/drawingml/2006/main" prst="rect">
             <a:avLst/>
@@ -8383,7 +8385,7 @@
           <a:lstStyle xmlns:a="http://schemas.openxmlformats.org/drawingml/2006/main"/>
           <a:p xmlns:a="http://schemas.openxmlformats.org/drawingml/2006/main">
             <a:pPr algn="l">
-              <a:defRPr sz="1500" b="0">
+              <a:defRPr sz="1575" b="0">
                 <a:solidFill>
                   <a:srgbClr val="17253A"/>
                 </a:solidFill>
@@ -8393,7 +8395,7 @@
               </a:defRPr>
             </a:pPr>
             <a:r>
-              <a:rPr sz="1500" b="0">
+              <a:rPr sz="1575" b="0">
                 <a:solidFill>
                   <a:srgbClr val="17253A"/>
                 </a:solidFill>
@@ -8401,7 +8403,7 @@
                 <a:ea typeface="Arial"/>
                 <a:cs typeface="Arial"/>
               </a:rPr>
-              <a:t>Identify the structure: Align digits by place value and include placeholder zeros.</a:t>
+              <a:t>34.750 + 8.906</a:t>
             </a:r>
           </a:p>
         </p:txBody>
@@ -8411,28 +8413,30 @@
           <p:cNvPr id="14" name="">
             <a:extLst xmlns:a="http://schemas.openxmlformats.org/drawingml/2006/main">
               <a:ext uri="{FF2B5EF4-FFF2-40B4-BE49-F238E27FC236}">
-                <a16:creationId xmlns:a16="http://schemas.microsoft.com/office/drawing/2014/main" id="{8571453B-0203-4F44-92DA-8ED2318D6127}"/>
-              </a:ext>
-            </a:extLst>
-          </p:cNvPr>
-          <p:cNvSpPr>
-            <a:spLocks xmlns:a="http://schemas.openxmlformats.org/drawingml/2006/main" noGrp="1"/>
-          </p:cNvSpPr>
-          <p:nvPr/>
-        </p:nvSpPr>
-        <p:spPr>
-          <a:xfrm xmlns:a="http://schemas.openxmlformats.org/drawingml/2006/main">
-            <a:off x="1000125" y="2990850"/>
-            <a:ext cx="476250" cy="476250"/>
-          </a:xfrm>
-          <a:prstGeom xmlns:a="http://schemas.openxmlformats.org/drawingml/2006/main" prst="ellipse">
+                <a16:creationId xmlns:a16="http://schemas.microsoft.com/office/drawing/2014/main" id="{8C52797B-7351-4094-8974-80E65009C64B}"/>
+              </a:ext>
+            </a:extLst>
+          </p:cNvPr>
+          <p:cNvSpPr>
+            <a:spLocks xmlns:a="http://schemas.openxmlformats.org/drawingml/2006/main" noGrp="1"/>
+          </p:cNvSpPr>
+          <p:nvPr/>
+        </p:nvSpPr>
+        <p:spPr>
+          <a:xfrm xmlns:a="http://schemas.openxmlformats.org/drawingml/2006/main">
+            <a:off x="1714500" y="2771775"/>
+            <a:ext cx="9334500" cy="9525"/>
+          </a:xfrm>
+          <a:prstGeom xmlns:a="http://schemas.openxmlformats.org/drawingml/2006/main" prst="rect">
             <a:avLst/>
           </a:prstGeom>
           <a:solidFill xmlns:a="http://schemas.openxmlformats.org/drawingml/2006/main">
-            <a:srgbClr val="2C6E73"/>
+            <a:srgbClr val="D9E0E6"/>
           </a:solidFill>
           <a:ln xmlns:a="http://schemas.openxmlformats.org/drawingml/2006/main" w="0">
-            <a:noFill/>
+            <a:solidFill>
+              <a:srgbClr val="D9E0E6"/>
+            </a:solidFill>
           </a:ln>
         </p:spPr>
       </p:sp>
@@ -8441,19 +8445,19 @@
           <p:cNvPr id="15" name="">
             <a:extLst xmlns:a="http://schemas.openxmlformats.org/drawingml/2006/main">
               <a:ext uri="{FF2B5EF4-FFF2-40B4-BE49-F238E27FC236}">
-                <a16:creationId xmlns:a16="http://schemas.microsoft.com/office/drawing/2014/main" id="{09679513-76EA-4D74-ABCD-62F4815F5175}"/>
-              </a:ext>
-            </a:extLst>
-          </p:cNvPr>
-          <p:cNvSpPr>
-            <a:spLocks xmlns:a="http://schemas.openxmlformats.org/drawingml/2006/main" noGrp="1"/>
-          </p:cNvSpPr>
-          <p:nvPr/>
-        </p:nvSpPr>
-        <p:spPr>
-          <a:xfrm xmlns:a="http://schemas.openxmlformats.org/drawingml/2006/main">
-            <a:off x="1000125" y="3019425"/>
-            <a:ext cx="476250" cy="419100"/>
+                <a16:creationId xmlns:a16="http://schemas.microsoft.com/office/drawing/2014/main" id="{1647099F-8B6F-43E8-8163-DA2C764F9957}"/>
+              </a:ext>
+            </a:extLst>
+          </p:cNvPr>
+          <p:cNvSpPr>
+            <a:spLocks xmlns:a="http://schemas.openxmlformats.org/drawingml/2006/main" noGrp="1"/>
+          </p:cNvSpPr>
+          <p:nvPr/>
+        </p:nvSpPr>
+        <p:spPr>
+          <a:xfrm xmlns:a="http://schemas.openxmlformats.org/drawingml/2006/main">
+            <a:off x="1162050" y="2905125"/>
+            <a:ext cx="400050" cy="400050"/>
           </a:xfrm>
           <a:prstGeom xmlns:a="http://schemas.openxmlformats.org/drawingml/2006/main" prst="rect">
             <a:avLst/>
@@ -8470,9 +8474,9 @@
           <a:lstStyle xmlns:a="http://schemas.openxmlformats.org/drawingml/2006/main"/>
           <a:p xmlns:a="http://schemas.openxmlformats.org/drawingml/2006/main">
             <a:pPr algn="ctr">
-              <a:defRPr sz="1350" b="1">
-                <a:solidFill>
-                  <a:srgbClr val="FFFFFF"/>
+              <a:defRPr sz="1125" b="1">
+                <a:solidFill>
+                  <a:srgbClr val="2C6E73"/>
                 </a:solidFill>
                 <a:latin typeface="Arial"/>
                 <a:ea typeface="Arial"/>
@@ -8480,9 +8484,9 @@
               </a:defRPr>
             </a:pPr>
             <a:r>
-              <a:rPr sz="1350" b="1">
-                <a:solidFill>
-                  <a:srgbClr val="FFFFFF"/>
+              <a:rPr sz="1125" b="1">
+                <a:solidFill>
+                  <a:srgbClr val="2C6E73"/>
                 </a:solidFill>
                 <a:latin typeface="Arial"/>
                 <a:ea typeface="Arial"/>
@@ -8498,19 +8502,19 @@
           <p:cNvPr id="16" name="">
             <a:extLst xmlns:a="http://schemas.openxmlformats.org/drawingml/2006/main">
               <a:ext uri="{FF2B5EF4-FFF2-40B4-BE49-F238E27FC236}">
-                <a16:creationId xmlns:a16="http://schemas.microsoft.com/office/drawing/2014/main" id="{CCAD44F0-A774-43C7-A491-1FD1B55EFB1D}"/>
-              </a:ext>
-            </a:extLst>
-          </p:cNvPr>
-          <p:cNvSpPr>
-            <a:spLocks xmlns:a="http://schemas.openxmlformats.org/drawingml/2006/main" noGrp="1"/>
-          </p:cNvSpPr>
-          <p:nvPr/>
-        </p:nvSpPr>
-        <p:spPr>
-          <a:xfrm xmlns:a="http://schemas.openxmlformats.org/drawingml/2006/main">
-            <a:off x="1714500" y="2924175"/>
-            <a:ext cx="9429750" cy="609600"/>
+                <a16:creationId xmlns:a16="http://schemas.microsoft.com/office/drawing/2014/main" id="{C9D36205-9921-4B0B-A037-0CB574CAE424}"/>
+              </a:ext>
+            </a:extLst>
+          </p:cNvPr>
+          <p:cNvSpPr>
+            <a:spLocks xmlns:a="http://schemas.openxmlformats.org/drawingml/2006/main" noGrp="1"/>
+          </p:cNvSpPr>
+          <p:nvPr/>
+        </p:nvSpPr>
+        <p:spPr>
+          <a:xfrm xmlns:a="http://schemas.openxmlformats.org/drawingml/2006/main">
+            <a:off x="1714500" y="2819400"/>
+            <a:ext cx="9525000" cy="638175"/>
           </a:xfrm>
           <a:prstGeom xmlns:a="http://schemas.openxmlformats.org/drawingml/2006/main" prst="rect">
             <a:avLst/>
@@ -8527,7 +8531,7 @@
           <a:lstStyle xmlns:a="http://schemas.openxmlformats.org/drawingml/2006/main"/>
           <a:p xmlns:a="http://schemas.openxmlformats.org/drawingml/2006/main">
             <a:pPr algn="l">
-              <a:defRPr sz="1500" b="0">
+              <a:defRPr sz="1575" b="0">
                 <a:solidFill>
                   <a:srgbClr val="17253A"/>
                 </a:solidFill>
@@ -8537,7 +8541,7 @@
               </a:defRPr>
             </a:pPr>
             <a:r>
-              <a:rPr sz="1500" b="0">
+              <a:rPr sz="1575" b="0">
                 <a:solidFill>
                   <a:srgbClr val="17253A"/>
                 </a:solidFill>
@@ -8545,7 +8549,7 @@
                 <a:ea typeface="Arial"/>
                 <a:cs typeface="Arial"/>
               </a:rPr>
-              <a:t>Set up the method: Calculate using the chosen mental or written method.</a:t>
+              <a:t>Thousandths: 0 + 6 = 6</a:t>
             </a:r>
           </a:p>
         </p:txBody>
@@ -8555,28 +8559,30 @@
           <p:cNvPr id="17" name="">
             <a:extLst xmlns:a="http://schemas.openxmlformats.org/drawingml/2006/main">
               <a:ext uri="{FF2B5EF4-FFF2-40B4-BE49-F238E27FC236}">
-                <a16:creationId xmlns:a16="http://schemas.microsoft.com/office/drawing/2014/main" id="{15E15BFE-CBDD-4FBA-8702-F1E45C0E2DB1}"/>
-              </a:ext>
-            </a:extLst>
-          </p:cNvPr>
-          <p:cNvSpPr>
-            <a:spLocks xmlns:a="http://schemas.openxmlformats.org/drawingml/2006/main" noGrp="1"/>
-          </p:cNvSpPr>
-          <p:nvPr/>
-        </p:nvSpPr>
-        <p:spPr>
-          <a:xfrm xmlns:a="http://schemas.openxmlformats.org/drawingml/2006/main">
-            <a:off x="1000125" y="3733800"/>
-            <a:ext cx="476250" cy="476250"/>
-          </a:xfrm>
-          <a:prstGeom xmlns:a="http://schemas.openxmlformats.org/drawingml/2006/main" prst="ellipse">
+                <a16:creationId xmlns:a16="http://schemas.microsoft.com/office/drawing/2014/main" id="{723A6166-C1EC-43D5-ADF2-A56CD0A74FA4}"/>
+              </a:ext>
+            </a:extLst>
+          </p:cNvPr>
+          <p:cNvSpPr>
+            <a:spLocks xmlns:a="http://schemas.openxmlformats.org/drawingml/2006/main" noGrp="1"/>
+          </p:cNvSpPr>
+          <p:nvPr/>
+        </p:nvSpPr>
+        <p:spPr>
+          <a:xfrm xmlns:a="http://schemas.openxmlformats.org/drawingml/2006/main">
+            <a:off x="1714500" y="3476625"/>
+            <a:ext cx="9334500" cy="9525"/>
+          </a:xfrm>
+          <a:prstGeom xmlns:a="http://schemas.openxmlformats.org/drawingml/2006/main" prst="rect">
             <a:avLst/>
           </a:prstGeom>
           <a:solidFill xmlns:a="http://schemas.openxmlformats.org/drawingml/2006/main">
-            <a:srgbClr val="2C6E73"/>
+            <a:srgbClr val="D9E0E6"/>
           </a:solidFill>
           <a:ln xmlns:a="http://schemas.openxmlformats.org/drawingml/2006/main" w="0">
-            <a:noFill/>
+            <a:solidFill>
+              <a:srgbClr val="D9E0E6"/>
+            </a:solidFill>
           </a:ln>
         </p:spPr>
       </p:sp>
@@ -8585,19 +8591,19 @@
           <p:cNvPr id="18" name="">
             <a:extLst xmlns:a="http://schemas.openxmlformats.org/drawingml/2006/main">
               <a:ext uri="{FF2B5EF4-FFF2-40B4-BE49-F238E27FC236}">
-                <a16:creationId xmlns:a16="http://schemas.microsoft.com/office/drawing/2014/main" id="{5528FB27-A5EF-4ABF-81BB-DD1126CB6C63}"/>
-              </a:ext>
-            </a:extLst>
-          </p:cNvPr>
-          <p:cNvSpPr>
-            <a:spLocks xmlns:a="http://schemas.openxmlformats.org/drawingml/2006/main" noGrp="1"/>
-          </p:cNvSpPr>
-          <p:nvPr/>
-        </p:nvSpPr>
-        <p:spPr>
-          <a:xfrm xmlns:a="http://schemas.openxmlformats.org/drawingml/2006/main">
-            <a:off x="1000125" y="3762375"/>
-            <a:ext cx="476250" cy="419100"/>
+                <a16:creationId xmlns:a16="http://schemas.microsoft.com/office/drawing/2014/main" id="{4084B921-619C-4327-9858-D8C072755FEB}"/>
+              </a:ext>
+            </a:extLst>
+          </p:cNvPr>
+          <p:cNvSpPr>
+            <a:spLocks xmlns:a="http://schemas.openxmlformats.org/drawingml/2006/main" noGrp="1"/>
+          </p:cNvSpPr>
+          <p:nvPr/>
+        </p:nvSpPr>
+        <p:spPr>
+          <a:xfrm xmlns:a="http://schemas.openxmlformats.org/drawingml/2006/main">
+            <a:off x="1162050" y="3609975"/>
+            <a:ext cx="400050" cy="400050"/>
           </a:xfrm>
           <a:prstGeom xmlns:a="http://schemas.openxmlformats.org/drawingml/2006/main" prst="rect">
             <a:avLst/>
@@ -8614,9 +8620,9 @@
           <a:lstStyle xmlns:a="http://schemas.openxmlformats.org/drawingml/2006/main"/>
           <a:p xmlns:a="http://schemas.openxmlformats.org/drawingml/2006/main">
             <a:pPr algn="ctr">
-              <a:defRPr sz="1350" b="1">
-                <a:solidFill>
-                  <a:srgbClr val="FFFFFF"/>
+              <a:defRPr sz="1125" b="1">
+                <a:solidFill>
+                  <a:srgbClr val="2C6E73"/>
                 </a:solidFill>
                 <a:latin typeface="Arial"/>
                 <a:ea typeface="Arial"/>
@@ -8624,9 +8630,9 @@
               </a:defRPr>
             </a:pPr>
             <a:r>
-              <a:rPr sz="1350" b="1">
-                <a:solidFill>
-                  <a:srgbClr val="FFFFFF"/>
+              <a:rPr sz="1125" b="1">
+                <a:solidFill>
+                  <a:srgbClr val="2C6E73"/>
                 </a:solidFill>
                 <a:latin typeface="Arial"/>
                 <a:ea typeface="Arial"/>
@@ -8642,19 +8648,19 @@
           <p:cNvPr id="19" name="">
             <a:extLst xmlns:a="http://schemas.openxmlformats.org/drawingml/2006/main">
               <a:ext uri="{FF2B5EF4-FFF2-40B4-BE49-F238E27FC236}">
-                <a16:creationId xmlns:a16="http://schemas.microsoft.com/office/drawing/2014/main" id="{F0CDA35E-C484-435A-8A35-9A2B7BAF9F2F}"/>
-              </a:ext>
-            </a:extLst>
-          </p:cNvPr>
-          <p:cNvSpPr>
-            <a:spLocks xmlns:a="http://schemas.openxmlformats.org/drawingml/2006/main" noGrp="1"/>
-          </p:cNvSpPr>
-          <p:nvPr/>
-        </p:nvSpPr>
-        <p:spPr>
-          <a:xfrm xmlns:a="http://schemas.openxmlformats.org/drawingml/2006/main">
-            <a:off x="1714500" y="3667125"/>
-            <a:ext cx="9429750" cy="609600"/>
+                <a16:creationId xmlns:a16="http://schemas.microsoft.com/office/drawing/2014/main" id="{4C0A2EC8-0F29-496C-A42A-C2AC8F6FED2E}"/>
+              </a:ext>
+            </a:extLst>
+          </p:cNvPr>
+          <p:cNvSpPr>
+            <a:spLocks xmlns:a="http://schemas.openxmlformats.org/drawingml/2006/main" noGrp="1"/>
+          </p:cNvSpPr>
+          <p:nvPr/>
+        </p:nvSpPr>
+        <p:spPr>
+          <a:xfrm xmlns:a="http://schemas.openxmlformats.org/drawingml/2006/main">
+            <a:off x="1714500" y="3524250"/>
+            <a:ext cx="9525000" cy="638175"/>
           </a:xfrm>
           <a:prstGeom xmlns:a="http://schemas.openxmlformats.org/drawingml/2006/main" prst="rect">
             <a:avLst/>
@@ -8671,7 +8677,7 @@
           <a:lstStyle xmlns:a="http://schemas.openxmlformats.org/drawingml/2006/main"/>
           <a:p xmlns:a="http://schemas.openxmlformats.org/drawingml/2006/main">
             <a:pPr algn="l">
-              <a:defRPr sz="1500" b="0">
+              <a:defRPr sz="1575" b="0">
                 <a:solidFill>
                   <a:srgbClr val="17253A"/>
                 </a:solidFill>
@@ -8681,7 +8687,7 @@
               </a:defRPr>
             </a:pPr>
             <a:r>
-              <a:rPr sz="1500" b="0">
+              <a:rPr sz="1575" b="0">
                 <a:solidFill>
                   <a:srgbClr val="17253A"/>
                 </a:solidFill>
@@ -8689,7 +8695,7 @@
                 <a:ea typeface="Arial"/>
                 <a:cs typeface="Arial"/>
               </a:rPr>
-              <a:t>Complete the calculation: 43.656.</a:t>
+              <a:t>Hundredths and tenths: 5 + 0 = 5; 7 + 9 = 16</a:t>
             </a:r>
           </a:p>
         </p:txBody>
@@ -8699,28 +8705,30 @@
           <p:cNvPr id="20" name="">
             <a:extLst xmlns:a="http://schemas.openxmlformats.org/drawingml/2006/main">
               <a:ext uri="{FF2B5EF4-FFF2-40B4-BE49-F238E27FC236}">
-                <a16:creationId xmlns:a16="http://schemas.microsoft.com/office/drawing/2014/main" id="{C81401DB-1A24-490F-99F1-44651999FA5B}"/>
-              </a:ext>
-            </a:extLst>
-          </p:cNvPr>
-          <p:cNvSpPr>
-            <a:spLocks xmlns:a="http://schemas.openxmlformats.org/drawingml/2006/main" noGrp="1"/>
-          </p:cNvSpPr>
-          <p:nvPr/>
-        </p:nvSpPr>
-        <p:spPr>
-          <a:xfrm xmlns:a="http://schemas.openxmlformats.org/drawingml/2006/main">
-            <a:off x="1000125" y="4476750"/>
-            <a:ext cx="476250" cy="476250"/>
-          </a:xfrm>
-          <a:prstGeom xmlns:a="http://schemas.openxmlformats.org/drawingml/2006/main" prst="ellipse">
+                <a16:creationId xmlns:a16="http://schemas.microsoft.com/office/drawing/2014/main" id="{E8558421-6F8C-441C-9A16-299853FC170B}"/>
+              </a:ext>
+            </a:extLst>
+          </p:cNvPr>
+          <p:cNvSpPr>
+            <a:spLocks xmlns:a="http://schemas.openxmlformats.org/drawingml/2006/main" noGrp="1"/>
+          </p:cNvSpPr>
+          <p:nvPr/>
+        </p:nvSpPr>
+        <p:spPr>
+          <a:xfrm xmlns:a="http://schemas.openxmlformats.org/drawingml/2006/main">
+            <a:off x="1714500" y="4181475"/>
+            <a:ext cx="9334500" cy="9525"/>
+          </a:xfrm>
+          <a:prstGeom xmlns:a="http://schemas.openxmlformats.org/drawingml/2006/main" prst="rect">
             <a:avLst/>
           </a:prstGeom>
           <a:solidFill xmlns:a="http://schemas.openxmlformats.org/drawingml/2006/main">
-            <a:srgbClr val="2C6E73"/>
+            <a:srgbClr val="D9E0E6"/>
           </a:solidFill>
           <a:ln xmlns:a="http://schemas.openxmlformats.org/drawingml/2006/main" w="0">
-            <a:noFill/>
+            <a:solidFill>
+              <a:srgbClr val="D9E0E6"/>
+            </a:solidFill>
           </a:ln>
         </p:spPr>
       </p:sp>
@@ -8729,19 +8737,19 @@
           <p:cNvPr id="21" name="">
             <a:extLst xmlns:a="http://schemas.openxmlformats.org/drawingml/2006/main">
               <a:ext uri="{FF2B5EF4-FFF2-40B4-BE49-F238E27FC236}">
-                <a16:creationId xmlns:a16="http://schemas.microsoft.com/office/drawing/2014/main" id="{485DCF04-175B-40CE-A1F2-B0DED5F989AF}"/>
-              </a:ext>
-            </a:extLst>
-          </p:cNvPr>
-          <p:cNvSpPr>
-            <a:spLocks xmlns:a="http://schemas.openxmlformats.org/drawingml/2006/main" noGrp="1"/>
-          </p:cNvSpPr>
-          <p:nvPr/>
-        </p:nvSpPr>
-        <p:spPr>
-          <a:xfrm xmlns:a="http://schemas.openxmlformats.org/drawingml/2006/main">
-            <a:off x="1000125" y="4505325"/>
-            <a:ext cx="476250" cy="419100"/>
+                <a16:creationId xmlns:a16="http://schemas.microsoft.com/office/drawing/2014/main" id="{E823BBE1-2C93-4ABB-86DC-D96ECEC8DDAB}"/>
+              </a:ext>
+            </a:extLst>
+          </p:cNvPr>
+          <p:cNvSpPr>
+            <a:spLocks xmlns:a="http://schemas.openxmlformats.org/drawingml/2006/main" noGrp="1"/>
+          </p:cNvSpPr>
+          <p:nvPr/>
+        </p:nvSpPr>
+        <p:spPr>
+          <a:xfrm xmlns:a="http://schemas.openxmlformats.org/drawingml/2006/main">
+            <a:off x="1162050" y="4314825"/>
+            <a:ext cx="400050" cy="400050"/>
           </a:xfrm>
           <a:prstGeom xmlns:a="http://schemas.openxmlformats.org/drawingml/2006/main" prst="rect">
             <a:avLst/>
@@ -8758,9 +8766,9 @@
           <a:lstStyle xmlns:a="http://schemas.openxmlformats.org/drawingml/2006/main"/>
           <a:p xmlns:a="http://schemas.openxmlformats.org/drawingml/2006/main">
             <a:pPr algn="ctr">
-              <a:defRPr sz="1350" b="1">
-                <a:solidFill>
-                  <a:srgbClr val="FFFFFF"/>
+              <a:defRPr sz="1125" b="1">
+                <a:solidFill>
+                  <a:srgbClr val="2C6E73"/>
                 </a:solidFill>
                 <a:latin typeface="Arial"/>
                 <a:ea typeface="Arial"/>
@@ -8768,9 +8776,9 @@
               </a:defRPr>
             </a:pPr>
             <a:r>
-              <a:rPr sz="1350" b="1">
-                <a:solidFill>
-                  <a:srgbClr val="FFFFFF"/>
+              <a:rPr sz="1125" b="1">
+                <a:solidFill>
+                  <a:srgbClr val="2C6E73"/>
                 </a:solidFill>
                 <a:latin typeface="Arial"/>
                 <a:ea typeface="Arial"/>
@@ -8786,19 +8794,19 @@
           <p:cNvPr id="22" name="">
             <a:extLst xmlns:a="http://schemas.openxmlformats.org/drawingml/2006/main">
               <a:ext uri="{FF2B5EF4-FFF2-40B4-BE49-F238E27FC236}">
-                <a16:creationId xmlns:a16="http://schemas.microsoft.com/office/drawing/2014/main" id="{0C88FF8D-F2D1-4C1D-AF54-1A9DDCA350B3}"/>
-              </a:ext>
-            </a:extLst>
-          </p:cNvPr>
-          <p:cNvSpPr>
-            <a:spLocks xmlns:a="http://schemas.openxmlformats.org/drawingml/2006/main" noGrp="1"/>
-          </p:cNvSpPr>
-          <p:nvPr/>
-        </p:nvSpPr>
-        <p:spPr>
-          <a:xfrm xmlns:a="http://schemas.openxmlformats.org/drawingml/2006/main">
-            <a:off x="1714500" y="4410075"/>
-            <a:ext cx="9429750" cy="609600"/>
+                <a16:creationId xmlns:a16="http://schemas.microsoft.com/office/drawing/2014/main" id="{CC1BFBFE-284D-4F71-90FA-ADD933F3F69D}"/>
+              </a:ext>
+            </a:extLst>
+          </p:cNvPr>
+          <p:cNvSpPr>
+            <a:spLocks xmlns:a="http://schemas.openxmlformats.org/drawingml/2006/main" noGrp="1"/>
+          </p:cNvSpPr>
+          <p:nvPr/>
+        </p:nvSpPr>
+        <p:spPr>
+          <a:xfrm xmlns:a="http://schemas.openxmlformats.org/drawingml/2006/main">
+            <a:off x="1714500" y="4229100"/>
+            <a:ext cx="9525000" cy="638175"/>
           </a:xfrm>
           <a:prstGeom xmlns:a="http://schemas.openxmlformats.org/drawingml/2006/main" prst="rect">
             <a:avLst/>
@@ -8815,9 +8823,9 @@
           <a:lstStyle xmlns:a="http://schemas.openxmlformats.org/drawingml/2006/main"/>
           <a:p xmlns:a="http://schemas.openxmlformats.org/drawingml/2006/main">
             <a:pPr algn="l">
-              <a:defRPr sz="1500" b="1">
-                <a:solidFill>
-                  <a:srgbClr val="2F785D"/>
+              <a:defRPr sz="1575" b="0">
+                <a:solidFill>
+                  <a:srgbClr val="17253A"/>
                 </a:solidFill>
                 <a:latin typeface="Arial"/>
                 <a:ea typeface="Arial"/>
@@ -8825,15 +8833,161 @@
               </a:defRPr>
             </a:pPr>
             <a:r>
-              <a:rPr sz="1500" b="1">
+              <a:rPr sz="1575" b="0">
+                <a:solidFill>
+                  <a:srgbClr val="17253A"/>
+                </a:solidFill>
+                <a:latin typeface="Arial"/>
+                <a:ea typeface="Arial"/>
+                <a:cs typeface="Arial"/>
+              </a:rPr>
+              <a:t>Ones and tens with exchange</a:t>
+            </a:r>
+          </a:p>
+        </p:txBody>
+      </p:sp>
+      <p:sp>
+        <p:nvSpPr>
+          <p:cNvPr id="23" name="">
+            <a:extLst xmlns:a="http://schemas.openxmlformats.org/drawingml/2006/main">
+              <a:ext uri="{FF2B5EF4-FFF2-40B4-BE49-F238E27FC236}">
+                <a16:creationId xmlns:a16="http://schemas.microsoft.com/office/drawing/2014/main" id="{197EB23F-7021-48FD-B08F-76A3B03E434E}"/>
+              </a:ext>
+            </a:extLst>
+          </p:cNvPr>
+          <p:cNvSpPr>
+            <a:spLocks xmlns:a="http://schemas.openxmlformats.org/drawingml/2006/main" noGrp="1"/>
+          </p:cNvSpPr>
+          <p:nvPr/>
+        </p:nvSpPr>
+        <p:spPr>
+          <a:xfrm xmlns:a="http://schemas.openxmlformats.org/drawingml/2006/main">
+            <a:off x="1714500" y="4886325"/>
+            <a:ext cx="9334500" cy="9525"/>
+          </a:xfrm>
+          <a:prstGeom xmlns:a="http://schemas.openxmlformats.org/drawingml/2006/main" prst="rect">
+            <a:avLst/>
+          </a:prstGeom>
+          <a:solidFill xmlns:a="http://schemas.openxmlformats.org/drawingml/2006/main">
+            <a:srgbClr val="D9E0E6"/>
+          </a:solidFill>
+          <a:ln xmlns:a="http://schemas.openxmlformats.org/drawingml/2006/main" w="0">
+            <a:solidFill>
+              <a:srgbClr val="D9E0E6"/>
+            </a:solidFill>
+          </a:ln>
+        </p:spPr>
+      </p:sp>
+      <p:sp>
+        <p:nvSpPr>
+          <p:cNvPr id="24" name="">
+            <a:extLst xmlns:a="http://schemas.openxmlformats.org/drawingml/2006/main">
+              <a:ext uri="{FF2B5EF4-FFF2-40B4-BE49-F238E27FC236}">
+                <a16:creationId xmlns:a16="http://schemas.microsoft.com/office/drawing/2014/main" id="{BF9F52CB-A949-4E58-A7F0-9781A30797D5}"/>
+              </a:ext>
+            </a:extLst>
+          </p:cNvPr>
+          <p:cNvSpPr>
+            <a:spLocks xmlns:a="http://schemas.openxmlformats.org/drawingml/2006/main" noGrp="1"/>
+          </p:cNvSpPr>
+          <p:nvPr/>
+        </p:nvSpPr>
+        <p:spPr>
+          <a:xfrm xmlns:a="http://schemas.openxmlformats.org/drawingml/2006/main">
+            <a:off x="1162050" y="5019675"/>
+            <a:ext cx="400050" cy="400050"/>
+          </a:xfrm>
+          <a:prstGeom xmlns:a="http://schemas.openxmlformats.org/drawingml/2006/main" prst="rect">
+            <a:avLst/>
+          </a:prstGeom>
+          <a:noFill xmlns:a="http://schemas.openxmlformats.org/drawingml/2006/main"/>
+          <a:ln xmlns:a="http://schemas.openxmlformats.org/drawingml/2006/main" w="0">
+            <a:noFill/>
+          </a:ln>
+        </p:spPr>
+        <p:txBody>
+          <a:bodyPr xmlns:a="http://schemas.openxmlformats.org/drawingml/2006/main" anchor="ctr">
+            <a:normAutofit fontScale="100000"/>
+          </a:bodyPr>
+          <a:lstStyle xmlns:a="http://schemas.openxmlformats.org/drawingml/2006/main"/>
+          <a:p xmlns:a="http://schemas.openxmlformats.org/drawingml/2006/main">
+            <a:pPr algn="ctr">
+              <a:defRPr sz="1125" b="1">
                 <a:solidFill>
                   <a:srgbClr val="2F785D"/>
                 </a:solidFill>
                 <a:latin typeface="Arial"/>
                 <a:ea typeface="Arial"/>
                 <a:cs typeface="Arial"/>
+              </a:defRPr>
+            </a:pPr>
+            <a:r>
+              <a:rPr sz="1125" b="1">
+                <a:solidFill>
+                  <a:srgbClr val="2F785D"/>
+                </a:solidFill>
+                <a:latin typeface="Arial"/>
+                <a:ea typeface="Arial"/>
+                <a:cs typeface="Arial"/>
               </a:rPr>
-              <a:t>Check the result: Estimate and check that the decimal point is reasonable.</a:t>
+              <a:t>5</a:t>
+            </a:r>
+          </a:p>
+        </p:txBody>
+      </p:sp>
+      <p:sp>
+        <p:nvSpPr>
+          <p:cNvPr id="25" name="">
+            <a:extLst xmlns:a="http://schemas.openxmlformats.org/drawingml/2006/main">
+              <a:ext uri="{FF2B5EF4-FFF2-40B4-BE49-F238E27FC236}">
+                <a16:creationId xmlns:a16="http://schemas.microsoft.com/office/drawing/2014/main" id="{76C87A27-6ACC-47B1-A31C-3155CEA6009F}"/>
+              </a:ext>
+            </a:extLst>
+          </p:cNvPr>
+          <p:cNvSpPr>
+            <a:spLocks xmlns:a="http://schemas.openxmlformats.org/drawingml/2006/main" noGrp="1"/>
+          </p:cNvSpPr>
+          <p:nvPr/>
+        </p:nvSpPr>
+        <p:spPr>
+          <a:xfrm xmlns:a="http://schemas.openxmlformats.org/drawingml/2006/main">
+            <a:off x="1714500" y="4933950"/>
+            <a:ext cx="9525000" cy="638175"/>
+          </a:xfrm>
+          <a:prstGeom xmlns:a="http://schemas.openxmlformats.org/drawingml/2006/main" prst="rect">
+            <a:avLst/>
+          </a:prstGeom>
+          <a:noFill xmlns:a="http://schemas.openxmlformats.org/drawingml/2006/main"/>
+          <a:ln xmlns:a="http://schemas.openxmlformats.org/drawingml/2006/main" w="0">
+            <a:noFill/>
+          </a:ln>
+        </p:spPr>
+        <p:txBody>
+          <a:bodyPr xmlns:a="http://schemas.openxmlformats.org/drawingml/2006/main" anchor="ctr">
+            <a:normAutofit fontScale="100000"/>
+          </a:bodyPr>
+          <a:lstStyle xmlns:a="http://schemas.openxmlformats.org/drawingml/2006/main"/>
+          <a:p xmlns:a="http://schemas.openxmlformats.org/drawingml/2006/main">
+            <a:pPr algn="l">
+              <a:defRPr sz="1575" b="1">
+                <a:solidFill>
+                  <a:srgbClr val="2F785D"/>
+                </a:solidFill>
+                <a:latin typeface="Arial"/>
+                <a:ea typeface="Arial"/>
+                <a:cs typeface="Arial"/>
+              </a:defRPr>
+            </a:pPr>
+            <a:r>
+              <a:rPr sz="1575" b="1">
+                <a:solidFill>
+                  <a:srgbClr val="2F785D"/>
+                </a:solidFill>
+                <a:latin typeface="Arial"/>
+                <a:ea typeface="Arial"/>
+                <a:cs typeface="Arial"/>
+              </a:rPr>
+              <a:t>43.656</a:t>
             </a:r>
           </a:p>
         </p:txBody>
@@ -8841,7 +8995,7 @@
     </p:spTree>
     <p:extLst>
       <p:ext uri="{BB962C8B-B14F-4D97-AF65-F5344CB8AC3E}">
-        <p14:creationId xmlns:p14="http://schemas.microsoft.com/office/powerpoint/2010/main" val="1077919694"/>
+        <p14:creationId xmlns:p14="http://schemas.microsoft.com/office/powerpoint/2010/main" val="2061507079"/>
       </p:ext>
     </p:extLst>
   </p:cSld>
@@ -9078,6 +9232,51 @@
                       </p:childTnLst>
                     </p:cTn>
                   </p:par>
+                  <p:par>
+                    <p:cTn id="23" fill="hold">
+                      <p:stCondLst>
+                        <p:cond delay="indefinite"/>
+                      </p:stCondLst>
+                      <p:childTnLst>
+                        <p:par>
+                          <p:cTn id="24" fill="hold">
+                            <p:stCondLst>
+                              <p:cond delay="0"/>
+                            </p:stCondLst>
+                            <p:childTnLst>
+                              <p:par>
+                                <p:cTn id="25" presetID="1" presetClass="entr" presetSubtype="0" fill="hold" grpId="0" nodeType="clickEffect">
+                                  <p:stCondLst>
+                                    <p:cond delay="0"/>
+                                  </p:stCondLst>
+                                  <p:childTnLst>
+                                    <p:set>
+                                      <p:cBhvr>
+                                        <p:cTn id="26" dur="1" fill="hold">
+                                          <p:stCondLst>
+                                            <p:cond delay="0"/>
+                                          </p:stCondLst>
+                                        </p:cTn>
+                                        <p:tgtEl>
+                                          <p:spTgt spid="25"/>
+                                        </p:tgtEl>
+                                        <p:attrNameLst>
+                                          <p:attrName>style.visibility</p:attrName>
+                                        </p:attrNameLst>
+                                      </p:cBhvr>
+                                      <p:to>
+                                        <p:strVal val="visible"/>
+                                      </p:to>
+                                    </p:set>
+                                  </p:childTnLst>
+                                </p:cTn>
+                              </p:par>
+                            </p:childTnLst>
+                          </p:cTn>
+                        </p:par>
+                      </p:childTnLst>
+                    </p:cTn>
+                  </p:par>
                 </p:childTnLst>
               </p:cTn>
               <p:prevCondLst>
@@ -9105,6 +9304,7 @@
       <p:bldP spid="16" grpId="0"/>
       <p:bldP spid="19" grpId="0"/>
       <p:bldP spid="22" grpId="0"/>
+      <p:bldP spid="25" grpId="0"/>
     </p:bldLst>
   </p:timing>
 </p:sld>
@@ -9134,7 +9334,7 @@
           <p:cNvPr id="15" name="">
             <a:extLst xmlns:a="http://schemas.openxmlformats.org/drawingml/2006/main">
               <a:ext uri="{FF2B5EF4-FFF2-40B4-BE49-F238E27FC236}">
-                <a16:creationId xmlns:a16="http://schemas.microsoft.com/office/drawing/2014/main" id="{5F1A4A77-6C9F-4522-B9E9-996CCAE1CFF1}"/>
+                <a16:creationId xmlns:a16="http://schemas.microsoft.com/office/drawing/2014/main" id="{3CD2754B-27EE-4BEC-B6C8-64AEE99FCDF8}"/>
               </a:ext>
             </a:extLst>
           </p:cNvPr>
@@ -9166,7 +9366,7 @@
           <p:cNvPr id="2" name="">
             <a:extLst xmlns:a="http://schemas.openxmlformats.org/drawingml/2006/main">
               <a:ext uri="{FF2B5EF4-FFF2-40B4-BE49-F238E27FC236}">
-                <a16:creationId xmlns:a16="http://schemas.microsoft.com/office/drawing/2014/main" id="{B64C1A9E-F368-41CE-9111-3CBA386F7553}"/>
+                <a16:creationId xmlns:a16="http://schemas.microsoft.com/office/drawing/2014/main" id="{60018B83-D5C9-4CF5-82D9-9101F78B76E9}"/>
               </a:ext>
             </a:extLst>
           </p:cNvPr>
@@ -9223,7 +9423,7 @@
           <p:cNvPr id="3" name="">
             <a:extLst xmlns:a="http://schemas.openxmlformats.org/drawingml/2006/main">
               <a:ext uri="{FF2B5EF4-FFF2-40B4-BE49-F238E27FC236}">
-                <a16:creationId xmlns:a16="http://schemas.microsoft.com/office/drawing/2014/main" id="{9A960FBE-F613-4BCF-ABD6-8F054BCDC197}"/>
+                <a16:creationId xmlns:a16="http://schemas.microsoft.com/office/drawing/2014/main" id="{99D391BB-08C0-47F3-900F-6D22F2E93728}"/>
               </a:ext>
             </a:extLst>
           </p:cNvPr>
@@ -9255,7 +9455,7 @@
           <p:cNvPr id="4" name="">
             <a:extLst xmlns:a="http://schemas.openxmlformats.org/drawingml/2006/main">
               <a:ext uri="{FF2B5EF4-FFF2-40B4-BE49-F238E27FC236}">
-                <a16:creationId xmlns:a16="http://schemas.microsoft.com/office/drawing/2014/main" id="{E30626D0-CE62-4CC2-8022-0507A7C14711}"/>
+                <a16:creationId xmlns:a16="http://schemas.microsoft.com/office/drawing/2014/main" id="{E303E771-87A9-4EF9-A004-1C43066CB634}"/>
               </a:ext>
             </a:extLst>
           </p:cNvPr>
@@ -9312,7 +9512,7 @@
           <p:cNvPr id="5" name="">
             <a:extLst xmlns:a="http://schemas.openxmlformats.org/drawingml/2006/main">
               <a:ext uri="{FF2B5EF4-FFF2-40B4-BE49-F238E27FC236}">
-                <a16:creationId xmlns:a16="http://schemas.microsoft.com/office/drawing/2014/main" id="{591688BA-6104-4D9C-AF9D-96EF856C62BE}"/>
+                <a16:creationId xmlns:a16="http://schemas.microsoft.com/office/drawing/2014/main" id="{D8F017DE-2C65-4061-9C32-9C477D362369}"/>
               </a:ext>
             </a:extLst>
           </p:cNvPr>
@@ -9369,7 +9569,7 @@
           <p:cNvPr id="6" name="">
             <a:extLst xmlns:a="http://schemas.openxmlformats.org/drawingml/2006/main">
               <a:ext uri="{FF2B5EF4-FFF2-40B4-BE49-F238E27FC236}">
-                <a16:creationId xmlns:a16="http://schemas.microsoft.com/office/drawing/2014/main" id="{AA3AE0BF-0AFC-404E-BCF6-B493E31BCB39}"/>
+                <a16:creationId xmlns:a16="http://schemas.microsoft.com/office/drawing/2014/main" id="{4F0195FB-B46D-42B1-8CA2-730DDB3DCD49}"/>
               </a:ext>
             </a:extLst>
           </p:cNvPr>
@@ -9426,7 +9626,7 @@
           <p:cNvPr id="7" name="">
             <a:extLst xmlns:a="http://schemas.openxmlformats.org/drawingml/2006/main">
               <a:ext uri="{FF2B5EF4-FFF2-40B4-BE49-F238E27FC236}">
-                <a16:creationId xmlns:a16="http://schemas.microsoft.com/office/drawing/2014/main" id="{44BE01E1-89CD-4804-9838-02FA98397F2F}"/>
+                <a16:creationId xmlns:a16="http://schemas.microsoft.com/office/drawing/2014/main" id="{ACCDC953-E94B-44DE-A72E-AD974F95594B}"/>
               </a:ext>
             </a:extLst>
           </p:cNvPr>
@@ -9458,7 +9658,7 @@
           <p:cNvPr id="8" name="">
             <a:extLst xmlns:a="http://schemas.openxmlformats.org/drawingml/2006/main">
               <a:ext uri="{FF2B5EF4-FFF2-40B4-BE49-F238E27FC236}">
-                <a16:creationId xmlns:a16="http://schemas.microsoft.com/office/drawing/2014/main" id="{84FB914C-1C08-42FC-A9E2-65B0495D131D}"/>
+                <a16:creationId xmlns:a16="http://schemas.microsoft.com/office/drawing/2014/main" id="{25771FC4-67C4-4CFB-A051-31C9E61D3D98}"/>
               </a:ext>
             </a:extLst>
           </p:cNvPr>
@@ -9515,7 +9715,7 @@
           <p:cNvPr id="9" name="">
             <a:extLst xmlns:a="http://schemas.openxmlformats.org/drawingml/2006/main">
               <a:ext uri="{FF2B5EF4-FFF2-40B4-BE49-F238E27FC236}">
-                <a16:creationId xmlns:a16="http://schemas.microsoft.com/office/drawing/2014/main" id="{30E5A301-12F6-4E2E-9023-3EF0414DC0BD}"/>
+                <a16:creationId xmlns:a16="http://schemas.microsoft.com/office/drawing/2014/main" id="{B029430A-2780-432E-9BCF-875D2779677C}"/>
               </a:ext>
             </a:extLst>
           </p:cNvPr>
@@ -9572,7 +9772,7 @@
           <p:cNvPr id="10" name="">
             <a:extLst xmlns:a="http://schemas.openxmlformats.org/drawingml/2006/main">
               <a:ext uri="{FF2B5EF4-FFF2-40B4-BE49-F238E27FC236}">
-                <a16:creationId xmlns:a16="http://schemas.microsoft.com/office/drawing/2014/main" id="{7CC2E370-35DD-41B0-AFE6-E336979188B1}"/>
+                <a16:creationId xmlns:a16="http://schemas.microsoft.com/office/drawing/2014/main" id="{AA51E14B-4D49-4FCA-AC9C-8EF627110DE1}"/>
               </a:ext>
             </a:extLst>
           </p:cNvPr>
@@ -9629,7 +9829,7 @@
           <p:cNvPr id="11" name="">
             <a:extLst xmlns:a="http://schemas.openxmlformats.org/drawingml/2006/main">
               <a:ext uri="{FF2B5EF4-FFF2-40B4-BE49-F238E27FC236}">
-                <a16:creationId xmlns:a16="http://schemas.microsoft.com/office/drawing/2014/main" id="{9729BE0C-8D40-4EAE-9396-43C77E957C17}"/>
+                <a16:creationId xmlns:a16="http://schemas.microsoft.com/office/drawing/2014/main" id="{CC09FB73-F9A4-4D70-8389-4D128B33552F}"/>
               </a:ext>
             </a:extLst>
           </p:cNvPr>
@@ -9686,7 +9886,7 @@
           <p:cNvPr id="12" name="">
             <a:extLst xmlns:a="http://schemas.openxmlformats.org/drawingml/2006/main">
               <a:ext uri="{FF2B5EF4-FFF2-40B4-BE49-F238E27FC236}">
-                <a16:creationId xmlns:a16="http://schemas.microsoft.com/office/drawing/2014/main" id="{B43E0C5C-7408-48BE-9452-45FF0ADE35D2}"/>
+                <a16:creationId xmlns:a16="http://schemas.microsoft.com/office/drawing/2014/main" id="{44349F23-C7BC-4967-A5B7-1565B6E2CF77}"/>
               </a:ext>
             </a:extLst>
           </p:cNvPr>
@@ -9718,7 +9918,7 @@
           <p:cNvPr id="13" name="">
             <a:extLst xmlns:a="http://schemas.openxmlformats.org/drawingml/2006/main">
               <a:ext uri="{FF2B5EF4-FFF2-40B4-BE49-F238E27FC236}">
-                <a16:creationId xmlns:a16="http://schemas.microsoft.com/office/drawing/2014/main" id="{69B056E3-4941-41C7-AE74-CCCDD9198949}"/>
+                <a16:creationId xmlns:a16="http://schemas.microsoft.com/office/drawing/2014/main" id="{A1DA764D-6E4A-4A94-9D6F-B391153441C9}"/>
               </a:ext>
             </a:extLst>
           </p:cNvPr>
@@ -9775,7 +9975,7 @@
           <p:cNvPr id="14" name="">
             <a:extLst xmlns:a="http://schemas.openxmlformats.org/drawingml/2006/main">
               <a:ext uri="{FF2B5EF4-FFF2-40B4-BE49-F238E27FC236}">
-                <a16:creationId xmlns:a16="http://schemas.microsoft.com/office/drawing/2014/main" id="{ECF434D1-2953-4EAE-ABBC-E88A44664B9E}"/>
+                <a16:creationId xmlns:a16="http://schemas.microsoft.com/office/drawing/2014/main" id="{41B4AC58-7D4C-4999-B81D-564918BBF29E}"/>
               </a:ext>
             </a:extLst>
           </p:cNvPr>
@@ -9830,7 +10030,7 @@
     </p:spTree>
     <p:extLst>
       <p:ext uri="{BB962C8B-B14F-4D97-AF65-F5344CB8AC3E}">
-        <p14:creationId xmlns:p14="http://schemas.microsoft.com/office/powerpoint/2010/main" val="500262670"/>
+        <p14:creationId xmlns:p14="http://schemas.microsoft.com/office/powerpoint/2010/main" val="1914992069"/>
       </p:ext>
     </p:extLst>
   </p:cSld>
@@ -10031,7 +10231,7 @@
           <p:cNvPr id="16" name="">
             <a:extLst xmlns:a="http://schemas.openxmlformats.org/drawingml/2006/main">
               <a:ext uri="{FF2B5EF4-FFF2-40B4-BE49-F238E27FC236}">
-                <a16:creationId xmlns:a16="http://schemas.microsoft.com/office/drawing/2014/main" id="{E35EBEBC-AD68-4FCA-8DC1-6CDF11072DFD}"/>
+                <a16:creationId xmlns:a16="http://schemas.microsoft.com/office/drawing/2014/main" id="{5F8D5B44-9F78-40ED-98E9-683F3F7D27B4}"/>
               </a:ext>
             </a:extLst>
           </p:cNvPr>
@@ -10063,7 +10263,7 @@
           <p:cNvPr id="2" name="">
             <a:extLst xmlns:a="http://schemas.openxmlformats.org/drawingml/2006/main">
               <a:ext uri="{FF2B5EF4-FFF2-40B4-BE49-F238E27FC236}">
-                <a16:creationId xmlns:a16="http://schemas.microsoft.com/office/drawing/2014/main" id="{D22ABE10-4555-4C1D-9E48-1E080F4A691B}"/>
+                <a16:creationId xmlns:a16="http://schemas.microsoft.com/office/drawing/2014/main" id="{3B633D92-ED6E-4A6C-B267-D1EAA11AB966}"/>
               </a:ext>
             </a:extLst>
           </p:cNvPr>
@@ -10120,7 +10320,7 @@
           <p:cNvPr id="3" name="">
             <a:extLst xmlns:a="http://schemas.openxmlformats.org/drawingml/2006/main">
               <a:ext uri="{FF2B5EF4-FFF2-40B4-BE49-F238E27FC236}">
-                <a16:creationId xmlns:a16="http://schemas.microsoft.com/office/drawing/2014/main" id="{48A3FF8C-3284-4322-AA17-B7AF155AABFD}"/>
+                <a16:creationId xmlns:a16="http://schemas.microsoft.com/office/drawing/2014/main" id="{E603FF43-586B-4BE1-86C4-B007DE83E8C9}"/>
               </a:ext>
             </a:extLst>
           </p:cNvPr>
@@ -10152,7 +10352,7 @@
           <p:cNvPr id="4" name="">
             <a:extLst xmlns:a="http://schemas.openxmlformats.org/drawingml/2006/main">
               <a:ext uri="{FF2B5EF4-FFF2-40B4-BE49-F238E27FC236}">
-                <a16:creationId xmlns:a16="http://schemas.microsoft.com/office/drawing/2014/main" id="{8BA67273-FCF9-4EBD-9A63-DA98801F683C}"/>
+                <a16:creationId xmlns:a16="http://schemas.microsoft.com/office/drawing/2014/main" id="{B423F2B1-0025-4BBA-8552-C7EC13242D0F}"/>
               </a:ext>
             </a:extLst>
           </p:cNvPr>
@@ -10209,7 +10409,7 @@
           <p:cNvPr id="5" name="">
             <a:extLst xmlns:a="http://schemas.openxmlformats.org/drawingml/2006/main">
               <a:ext uri="{FF2B5EF4-FFF2-40B4-BE49-F238E27FC236}">
-                <a16:creationId xmlns:a16="http://schemas.microsoft.com/office/drawing/2014/main" id="{438B0B06-2534-41B3-9472-E184A4CB70A3}"/>
+                <a16:creationId xmlns:a16="http://schemas.microsoft.com/office/drawing/2014/main" id="{A21F6CAC-1B80-4828-BA57-696228502CC6}"/>
               </a:ext>
             </a:extLst>
           </p:cNvPr>
@@ -10266,7 +10466,7 @@
           <p:cNvPr id="6" name="">
             <a:extLst xmlns:a="http://schemas.openxmlformats.org/drawingml/2006/main">
               <a:ext uri="{FF2B5EF4-FFF2-40B4-BE49-F238E27FC236}">
-                <a16:creationId xmlns:a16="http://schemas.microsoft.com/office/drawing/2014/main" id="{A1427762-797F-4059-AECB-145F6B1327F0}"/>
+                <a16:creationId xmlns:a16="http://schemas.microsoft.com/office/drawing/2014/main" id="{3C7F8AB3-6F89-454F-A5F9-664F47E9E141}"/>
               </a:ext>
             </a:extLst>
           </p:cNvPr>
@@ -10323,7 +10523,7 @@
           <p:cNvPr id="7" name="">
             <a:extLst xmlns:a="http://schemas.openxmlformats.org/drawingml/2006/main">
               <a:ext uri="{FF2B5EF4-FFF2-40B4-BE49-F238E27FC236}">
-                <a16:creationId xmlns:a16="http://schemas.microsoft.com/office/drawing/2014/main" id="{C1A380CD-806B-4DEC-ADBF-D5F95A535B96}"/>
+                <a16:creationId xmlns:a16="http://schemas.microsoft.com/office/drawing/2014/main" id="{651926C8-C0EB-49E9-A284-17CDC1009176}"/>
               </a:ext>
             </a:extLst>
           </p:cNvPr>
@@ -10355,7 +10555,7 @@
           <p:cNvPr id="8" name="">
             <a:extLst xmlns:a="http://schemas.openxmlformats.org/drawingml/2006/main">
               <a:ext uri="{FF2B5EF4-FFF2-40B4-BE49-F238E27FC236}">
-                <a16:creationId xmlns:a16="http://schemas.microsoft.com/office/drawing/2014/main" id="{85AF50CD-8D70-42DA-8E1C-58B70D40B1D6}"/>
+                <a16:creationId xmlns:a16="http://schemas.microsoft.com/office/drawing/2014/main" id="{8692D311-1D54-4947-8E9C-D21FBBBC0B0A}"/>
               </a:ext>
             </a:extLst>
           </p:cNvPr>
@@ -10412,7 +10612,7 @@
           <p:cNvPr id="9" name="">
             <a:extLst xmlns:a="http://schemas.openxmlformats.org/drawingml/2006/main">
               <a:ext uri="{FF2B5EF4-FFF2-40B4-BE49-F238E27FC236}">
-                <a16:creationId xmlns:a16="http://schemas.microsoft.com/office/drawing/2014/main" id="{1E942555-F5C2-458A-B317-9299B76D6935}"/>
+                <a16:creationId xmlns:a16="http://schemas.microsoft.com/office/drawing/2014/main" id="{FCC615AA-CDB6-42DB-B155-D8946F43E890}"/>
               </a:ext>
             </a:extLst>
           </p:cNvPr>
@@ -10469,7 +10669,7 @@
           <p:cNvPr id="10" name="">
             <a:extLst xmlns:a="http://schemas.openxmlformats.org/drawingml/2006/main">
               <a:ext uri="{FF2B5EF4-FFF2-40B4-BE49-F238E27FC236}">
-                <a16:creationId xmlns:a16="http://schemas.microsoft.com/office/drawing/2014/main" id="{4B895B89-F62E-4FA8-B2F4-C5D30D99BED9}"/>
+                <a16:creationId xmlns:a16="http://schemas.microsoft.com/office/drawing/2014/main" id="{338614FB-444E-49BB-A837-25B9EF6CC373}"/>
               </a:ext>
             </a:extLst>
           </p:cNvPr>
@@ -10526,7 +10726,7 @@
           <p:cNvPr id="11" name="">
             <a:extLst xmlns:a="http://schemas.openxmlformats.org/drawingml/2006/main">
               <a:ext uri="{FF2B5EF4-FFF2-40B4-BE49-F238E27FC236}">
-                <a16:creationId xmlns:a16="http://schemas.microsoft.com/office/drawing/2014/main" id="{AD3676E9-B322-4916-B126-C529631733D6}"/>
+                <a16:creationId xmlns:a16="http://schemas.microsoft.com/office/drawing/2014/main" id="{6A282320-3F3A-4B7C-9D2A-4D0B68789F0A}"/>
               </a:ext>
             </a:extLst>
           </p:cNvPr>
@@ -10583,7 +10783,7 @@
           <p:cNvPr id="12" name="">
             <a:extLst xmlns:a="http://schemas.openxmlformats.org/drawingml/2006/main">
               <a:ext uri="{FF2B5EF4-FFF2-40B4-BE49-F238E27FC236}">
-                <a16:creationId xmlns:a16="http://schemas.microsoft.com/office/drawing/2014/main" id="{97FF5D57-2A64-4FF1-8458-9D345EF3D782}"/>
+                <a16:creationId xmlns:a16="http://schemas.microsoft.com/office/drawing/2014/main" id="{9F284272-E1DD-4BFE-9EE9-9140E76D0CA0}"/>
               </a:ext>
             </a:extLst>
           </p:cNvPr>
@@ -10640,7 +10840,7 @@
           <p:cNvPr id="13" name="">
             <a:extLst xmlns:a="http://schemas.openxmlformats.org/drawingml/2006/main">
               <a:ext uri="{FF2B5EF4-FFF2-40B4-BE49-F238E27FC236}">
-                <a16:creationId xmlns:a16="http://schemas.microsoft.com/office/drawing/2014/main" id="{A575DAB0-6478-4C28-85DB-F10F1D8D2C81}"/>
+                <a16:creationId xmlns:a16="http://schemas.microsoft.com/office/drawing/2014/main" id="{42D33E9F-AE6F-402E-90F8-ADFA456B1DF4}"/>
               </a:ext>
             </a:extLst>
           </p:cNvPr>
@@ -10697,7 +10897,7 @@
           <p:cNvPr id="14" name="">
             <a:extLst xmlns:a="http://schemas.openxmlformats.org/drawingml/2006/main">
               <a:ext uri="{FF2B5EF4-FFF2-40B4-BE49-F238E27FC236}">
-                <a16:creationId xmlns:a16="http://schemas.microsoft.com/office/drawing/2014/main" id="{BC21E2DE-7736-44CC-8D8F-CA47ED113CB6}"/>
+                <a16:creationId xmlns:a16="http://schemas.microsoft.com/office/drawing/2014/main" id="{6AEDD3A3-1147-4B32-B58B-D6C0AF549C49}"/>
               </a:ext>
             </a:extLst>
           </p:cNvPr>
@@ -10754,7 +10954,7 @@
           <p:cNvPr id="15" name="">
             <a:extLst xmlns:a="http://schemas.openxmlformats.org/drawingml/2006/main">
               <a:ext uri="{FF2B5EF4-FFF2-40B4-BE49-F238E27FC236}">
-                <a16:creationId xmlns:a16="http://schemas.microsoft.com/office/drawing/2014/main" id="{E9E8D091-AC10-4CF1-809F-F49FF80EBB0F}"/>
+                <a16:creationId xmlns:a16="http://schemas.microsoft.com/office/drawing/2014/main" id="{519F27E0-6675-4DAB-AA6D-4DC5CEB67BC5}"/>
               </a:ext>
             </a:extLst>
           </p:cNvPr>
@@ -10809,7 +11009,7 @@
     </p:spTree>
     <p:extLst>
       <p:ext uri="{BB962C8B-B14F-4D97-AF65-F5344CB8AC3E}">
-        <p14:creationId xmlns:p14="http://schemas.microsoft.com/office/powerpoint/2010/main" val="446869390"/>
+        <p14:creationId xmlns:p14="http://schemas.microsoft.com/office/powerpoint/2010/main" val="915991932"/>
       </p:ext>
     </p:extLst>
   </p:cSld>
@@ -10964,7 +11164,7 @@
           <p:cNvPr id="16" name="">
             <a:extLst xmlns:a="http://schemas.openxmlformats.org/drawingml/2006/main">
               <a:ext uri="{FF2B5EF4-FFF2-40B4-BE49-F238E27FC236}">
-                <a16:creationId xmlns:a16="http://schemas.microsoft.com/office/drawing/2014/main" id="{88AA2E49-E154-4A51-B98D-FF816A6D94B5}"/>
+                <a16:creationId xmlns:a16="http://schemas.microsoft.com/office/drawing/2014/main" id="{3BA3AF22-19E3-435A-BC0F-C382722F37B0}"/>
               </a:ext>
             </a:extLst>
           </p:cNvPr>
@@ -10996,7 +11196,7 @@
           <p:cNvPr id="2" name="">
             <a:extLst xmlns:a="http://schemas.openxmlformats.org/drawingml/2006/main">
               <a:ext uri="{FF2B5EF4-FFF2-40B4-BE49-F238E27FC236}">
-                <a16:creationId xmlns:a16="http://schemas.microsoft.com/office/drawing/2014/main" id="{730911EA-4458-4647-809B-ADCE3778A950}"/>
+                <a16:creationId xmlns:a16="http://schemas.microsoft.com/office/drawing/2014/main" id="{920A7DEA-2131-43A2-A29A-C2332FAB0D2E}"/>
               </a:ext>
             </a:extLst>
           </p:cNvPr>
@@ -11053,7 +11253,7 @@
           <p:cNvPr id="3" name="">
             <a:extLst xmlns:a="http://schemas.openxmlformats.org/drawingml/2006/main">
               <a:ext uri="{FF2B5EF4-FFF2-40B4-BE49-F238E27FC236}">
-                <a16:creationId xmlns:a16="http://schemas.microsoft.com/office/drawing/2014/main" id="{2BC2E91A-115F-4A94-8EE7-922101AF285D}"/>
+                <a16:creationId xmlns:a16="http://schemas.microsoft.com/office/drawing/2014/main" id="{12CC6130-3B86-479A-977F-EB7E7B01DED1}"/>
               </a:ext>
             </a:extLst>
           </p:cNvPr>
@@ -11085,7 +11285,7 @@
           <p:cNvPr id="4" name="">
             <a:extLst xmlns:a="http://schemas.openxmlformats.org/drawingml/2006/main">
               <a:ext uri="{FF2B5EF4-FFF2-40B4-BE49-F238E27FC236}">
-                <a16:creationId xmlns:a16="http://schemas.microsoft.com/office/drawing/2014/main" id="{D8C76650-B3A9-4BED-8359-F151FFF3EDB0}"/>
+                <a16:creationId xmlns:a16="http://schemas.microsoft.com/office/drawing/2014/main" id="{80698A61-785E-4B2E-84A1-6BE45619F236}"/>
               </a:ext>
             </a:extLst>
           </p:cNvPr>
@@ -11142,7 +11342,7 @@
           <p:cNvPr id="5" name="">
             <a:extLst xmlns:a="http://schemas.openxmlformats.org/drawingml/2006/main">
               <a:ext uri="{FF2B5EF4-FFF2-40B4-BE49-F238E27FC236}">
-                <a16:creationId xmlns:a16="http://schemas.microsoft.com/office/drawing/2014/main" id="{CB0FB0F7-1DE8-4FB9-80DF-D418DB8FFA52}"/>
+                <a16:creationId xmlns:a16="http://schemas.microsoft.com/office/drawing/2014/main" id="{AE8E84BE-7DEF-4B41-AC67-455EFB5AAAE2}"/>
               </a:ext>
             </a:extLst>
           </p:cNvPr>
@@ -11199,7 +11399,7 @@
           <p:cNvPr id="6" name="">
             <a:extLst xmlns:a="http://schemas.openxmlformats.org/drawingml/2006/main">
               <a:ext uri="{FF2B5EF4-FFF2-40B4-BE49-F238E27FC236}">
-                <a16:creationId xmlns:a16="http://schemas.microsoft.com/office/drawing/2014/main" id="{B7729D92-3ABE-467A-92A1-E6708FD65293}"/>
+                <a16:creationId xmlns:a16="http://schemas.microsoft.com/office/drawing/2014/main" id="{FF5F7C2A-9F05-499B-A2D4-8B573BB45751}"/>
               </a:ext>
             </a:extLst>
           </p:cNvPr>
@@ -11256,7 +11456,7 @@
           <p:cNvPr id="7" name="">
             <a:extLst xmlns:a="http://schemas.openxmlformats.org/drawingml/2006/main">
               <a:ext uri="{FF2B5EF4-FFF2-40B4-BE49-F238E27FC236}">
-                <a16:creationId xmlns:a16="http://schemas.microsoft.com/office/drawing/2014/main" id="{1ADF504F-4FC1-4BD5-A456-24F7EA3113CC}"/>
+                <a16:creationId xmlns:a16="http://schemas.microsoft.com/office/drawing/2014/main" id="{EAA1C49E-EC8F-4034-A279-A1C9E5AB897D}"/>
               </a:ext>
             </a:extLst>
           </p:cNvPr>
@@ -11288,7 +11488,7 @@
           <p:cNvPr id="8" name="">
             <a:extLst xmlns:a="http://schemas.openxmlformats.org/drawingml/2006/main">
               <a:ext uri="{FF2B5EF4-FFF2-40B4-BE49-F238E27FC236}">
-                <a16:creationId xmlns:a16="http://schemas.microsoft.com/office/drawing/2014/main" id="{ABF1B6DA-BD6A-4EC4-A3C5-22AB481E8151}"/>
+                <a16:creationId xmlns:a16="http://schemas.microsoft.com/office/drawing/2014/main" id="{BF051CED-CBC5-4C50-A5EC-FDA76C953F2E}"/>
               </a:ext>
             </a:extLst>
           </p:cNvPr>
@@ -11345,7 +11545,7 @@
           <p:cNvPr id="9" name="">
             <a:extLst xmlns:a="http://schemas.openxmlformats.org/drawingml/2006/main">
               <a:ext uri="{FF2B5EF4-FFF2-40B4-BE49-F238E27FC236}">
-                <a16:creationId xmlns:a16="http://schemas.microsoft.com/office/drawing/2014/main" id="{D0C3A8AD-FB0B-441F-BE26-42AE1854CCA2}"/>
+                <a16:creationId xmlns:a16="http://schemas.microsoft.com/office/drawing/2014/main" id="{438FD2A2-4552-4D42-B46F-AC176DAD31AA}"/>
               </a:ext>
             </a:extLst>
           </p:cNvPr>
@@ -11406,7 +11606,7 @@
           <p:nvPr/>
         </p:nvPicPr>
         <p:blipFill>
-          <a:blip xmlns:r="http://schemas.openxmlformats.org/officeDocument/2006/relationships" xmlns:a="http://schemas.openxmlformats.org/drawingml/2006/main" r:embed="R120e2748aa82425b"/>
+          <a:blip xmlns:r="http://schemas.openxmlformats.org/officeDocument/2006/relationships" xmlns:a="http://schemas.openxmlformats.org/drawingml/2006/main" r:embed="R26c2b1ec07c94220"/>
           <a:stretch xmlns:a="http://schemas.openxmlformats.org/drawingml/2006/main"/>
         </p:blipFill>
         <p:spPr>
@@ -11424,7 +11624,7 @@
           <p:cNvPr id="11" name="">
             <a:extLst xmlns:a="http://schemas.openxmlformats.org/drawingml/2006/main">
               <a:ext uri="{FF2B5EF4-FFF2-40B4-BE49-F238E27FC236}">
-                <a16:creationId xmlns:a16="http://schemas.microsoft.com/office/drawing/2014/main" id="{72EECF4F-05A8-4B08-8F97-20372D19F8D1}"/>
+                <a16:creationId xmlns:a16="http://schemas.microsoft.com/office/drawing/2014/main" id="{32F68343-A077-44CF-A29B-492CD67DFBE6}"/>
               </a:ext>
             </a:extLst>
           </p:cNvPr>
@@ -11481,7 +11681,7 @@
           <p:cNvPr id="12" name="">
             <a:extLst xmlns:a="http://schemas.openxmlformats.org/drawingml/2006/main">
               <a:ext uri="{FF2B5EF4-FFF2-40B4-BE49-F238E27FC236}">
-                <a16:creationId xmlns:a16="http://schemas.microsoft.com/office/drawing/2014/main" id="{FEB4A8AF-0011-4158-80EF-598A731B4295}"/>
+                <a16:creationId xmlns:a16="http://schemas.microsoft.com/office/drawing/2014/main" id="{AAD026A1-3CC6-4F59-A4E6-07297A894FB6}"/>
               </a:ext>
             </a:extLst>
           </p:cNvPr>
@@ -11538,7 +11738,7 @@
           <p:cNvPr id="13" name="">
             <a:extLst xmlns:a="http://schemas.openxmlformats.org/drawingml/2006/main">
               <a:ext uri="{FF2B5EF4-FFF2-40B4-BE49-F238E27FC236}">
-                <a16:creationId xmlns:a16="http://schemas.microsoft.com/office/drawing/2014/main" id="{D886AD9E-2FC7-4311-9BDF-8EADD6BDC495}"/>
+                <a16:creationId xmlns:a16="http://schemas.microsoft.com/office/drawing/2014/main" id="{2B947D2C-234C-4BB2-A815-B4F489C957F8}"/>
               </a:ext>
             </a:extLst>
           </p:cNvPr>
@@ -11570,7 +11770,7 @@
           <p:cNvPr id="14" name="">
             <a:extLst xmlns:a="http://schemas.openxmlformats.org/drawingml/2006/main">
               <a:ext uri="{FF2B5EF4-FFF2-40B4-BE49-F238E27FC236}">
-                <a16:creationId xmlns:a16="http://schemas.microsoft.com/office/drawing/2014/main" id="{94A4C196-CA76-4D35-9ECD-3C54EE78384E}"/>
+                <a16:creationId xmlns:a16="http://schemas.microsoft.com/office/drawing/2014/main" id="{BCD431F4-737B-46CC-A776-229F6B091CA3}"/>
               </a:ext>
             </a:extLst>
           </p:cNvPr>
@@ -11627,7 +11827,7 @@
           <p:cNvPr id="15" name="">
             <a:extLst xmlns:a="http://schemas.openxmlformats.org/drawingml/2006/main">
               <a:ext uri="{FF2B5EF4-FFF2-40B4-BE49-F238E27FC236}">
-                <a16:creationId xmlns:a16="http://schemas.microsoft.com/office/drawing/2014/main" id="{E233E54B-AB44-4ABC-A371-C7F8A5BE9CC1}"/>
+                <a16:creationId xmlns:a16="http://schemas.microsoft.com/office/drawing/2014/main" id="{44840329-233F-4D5E-9B98-E911C5BDFFF9}"/>
               </a:ext>
             </a:extLst>
           </p:cNvPr>
@@ -11682,7 +11882,7 @@
     </p:spTree>
     <p:extLst>
       <p:ext uri="{BB962C8B-B14F-4D97-AF65-F5344CB8AC3E}">
-        <p14:creationId xmlns:p14="http://schemas.microsoft.com/office/powerpoint/2010/main" val="1295375763"/>
+        <p14:creationId xmlns:p14="http://schemas.microsoft.com/office/powerpoint/2010/main" val="1296970771"/>
       </p:ext>
     </p:extLst>
   </p:cSld>
@@ -11837,7 +12037,7 @@
           <p:cNvPr id="23" name="">
             <a:extLst xmlns:a="http://schemas.openxmlformats.org/drawingml/2006/main">
               <a:ext uri="{FF2B5EF4-FFF2-40B4-BE49-F238E27FC236}">
-                <a16:creationId xmlns:a16="http://schemas.microsoft.com/office/drawing/2014/main" id="{A807D83C-9C2A-4514-B12E-174DCB2B32DC}"/>
+                <a16:creationId xmlns:a16="http://schemas.microsoft.com/office/drawing/2014/main" id="{2B42D2A7-3DE8-45BE-AFDE-E6D42A91BBA9}"/>
               </a:ext>
             </a:extLst>
           </p:cNvPr>
@@ -11869,7 +12069,7 @@
           <p:cNvPr id="2" name="">
             <a:extLst xmlns:a="http://schemas.openxmlformats.org/drawingml/2006/main">
               <a:ext uri="{FF2B5EF4-FFF2-40B4-BE49-F238E27FC236}">
-                <a16:creationId xmlns:a16="http://schemas.microsoft.com/office/drawing/2014/main" id="{57EA0D3B-E813-4AA6-B6A3-B87E8D21C908}"/>
+                <a16:creationId xmlns:a16="http://schemas.microsoft.com/office/drawing/2014/main" id="{02B4B104-A60F-4AD5-BF4B-C5DF97E228C4}"/>
               </a:ext>
             </a:extLst>
           </p:cNvPr>
@@ -11926,7 +12126,7 @@
           <p:cNvPr id="3" name="">
             <a:extLst xmlns:a="http://schemas.openxmlformats.org/drawingml/2006/main">
               <a:ext uri="{FF2B5EF4-FFF2-40B4-BE49-F238E27FC236}">
-                <a16:creationId xmlns:a16="http://schemas.microsoft.com/office/drawing/2014/main" id="{CABDDB0D-FE9A-4F48-8559-D337E1C18804}"/>
+                <a16:creationId xmlns:a16="http://schemas.microsoft.com/office/drawing/2014/main" id="{82EBECD0-ABAB-45CD-A789-6501386353CB}"/>
               </a:ext>
             </a:extLst>
           </p:cNvPr>
@@ -11958,7 +12158,7 @@
           <p:cNvPr id="4" name="">
             <a:extLst xmlns:a="http://schemas.openxmlformats.org/drawingml/2006/main">
               <a:ext uri="{FF2B5EF4-FFF2-40B4-BE49-F238E27FC236}">
-                <a16:creationId xmlns:a16="http://schemas.microsoft.com/office/drawing/2014/main" id="{FA029386-5F0E-4D7D-9B3B-394432C6538A}"/>
+                <a16:creationId xmlns:a16="http://schemas.microsoft.com/office/drawing/2014/main" id="{62A7D864-07C7-493F-8374-C8790C764D88}"/>
               </a:ext>
             </a:extLst>
           </p:cNvPr>
@@ -12015,7 +12215,7 @@
           <p:cNvPr id="5" name="">
             <a:extLst xmlns:a="http://schemas.openxmlformats.org/drawingml/2006/main">
               <a:ext uri="{FF2B5EF4-FFF2-40B4-BE49-F238E27FC236}">
-                <a16:creationId xmlns:a16="http://schemas.microsoft.com/office/drawing/2014/main" id="{D6530AF8-E331-4B51-BFED-3AE85E32F9EC}"/>
+                <a16:creationId xmlns:a16="http://schemas.microsoft.com/office/drawing/2014/main" id="{E72EB62D-8870-446E-B651-D2E8E8C12E40}"/>
               </a:ext>
             </a:extLst>
           </p:cNvPr>
@@ -12072,7 +12272,7 @@
           <p:cNvPr id="6" name="">
             <a:extLst xmlns:a="http://schemas.openxmlformats.org/drawingml/2006/main">
               <a:ext uri="{FF2B5EF4-FFF2-40B4-BE49-F238E27FC236}">
-                <a16:creationId xmlns:a16="http://schemas.microsoft.com/office/drawing/2014/main" id="{FEB6E40E-E470-4B3F-86BE-2576E699F172}"/>
+                <a16:creationId xmlns:a16="http://schemas.microsoft.com/office/drawing/2014/main" id="{C4FFA486-6036-4C62-B8A7-9992FD15A06A}"/>
               </a:ext>
             </a:extLst>
           </p:cNvPr>
@@ -12129,7 +12329,7 @@
           <p:cNvPr id="7" name="">
             <a:extLst xmlns:a="http://schemas.openxmlformats.org/drawingml/2006/main">
               <a:ext uri="{FF2B5EF4-FFF2-40B4-BE49-F238E27FC236}">
-                <a16:creationId xmlns:a16="http://schemas.microsoft.com/office/drawing/2014/main" id="{AEAFDDC4-4174-42FE-9615-C82850A9C85F}"/>
+                <a16:creationId xmlns:a16="http://schemas.microsoft.com/office/drawing/2014/main" id="{11A907BF-6EC1-43CC-B9FD-31FE82F541E4}"/>
               </a:ext>
             </a:extLst>
           </p:cNvPr>
@@ -12161,7 +12361,7 @@
           <p:cNvPr id="8" name="">
             <a:extLst xmlns:a="http://schemas.openxmlformats.org/drawingml/2006/main">
               <a:ext uri="{FF2B5EF4-FFF2-40B4-BE49-F238E27FC236}">
-                <a16:creationId xmlns:a16="http://schemas.microsoft.com/office/drawing/2014/main" id="{4C0D5E67-154D-4605-A586-D47B07ABCF94}"/>
+                <a16:creationId xmlns:a16="http://schemas.microsoft.com/office/drawing/2014/main" id="{411CD656-9585-4B48-A7DD-FF6FB93F0C60}"/>
               </a:ext>
             </a:extLst>
           </p:cNvPr>
@@ -12218,7 +12418,7 @@
           <p:cNvPr id="9" name="">
             <a:extLst xmlns:a="http://schemas.openxmlformats.org/drawingml/2006/main">
               <a:ext uri="{FF2B5EF4-FFF2-40B4-BE49-F238E27FC236}">
-                <a16:creationId xmlns:a16="http://schemas.microsoft.com/office/drawing/2014/main" id="{E84F3550-6522-4E00-92EE-13724BBFD815}"/>
+                <a16:creationId xmlns:a16="http://schemas.microsoft.com/office/drawing/2014/main" id="{EC1AD5F2-BC4A-4F14-AB8F-91D796A9AF3F}"/>
               </a:ext>
             </a:extLst>
           </p:cNvPr>
@@ -12275,7 +12475,7 @@
           <p:cNvPr id="10" name="">
             <a:extLst xmlns:a="http://schemas.openxmlformats.org/drawingml/2006/main">
               <a:ext uri="{FF2B5EF4-FFF2-40B4-BE49-F238E27FC236}">
-                <a16:creationId xmlns:a16="http://schemas.microsoft.com/office/drawing/2014/main" id="{728F835B-84F5-4D30-9681-437AE6CC2960}"/>
+                <a16:creationId xmlns:a16="http://schemas.microsoft.com/office/drawing/2014/main" id="{47335CA5-BF48-4FAA-B4AD-AE8BBE46F5EF}"/>
               </a:ext>
             </a:extLst>
           </p:cNvPr>
@@ -12309,7 +12509,7 @@
           <p:cNvPr id="11" name="">
             <a:extLst xmlns:a="http://schemas.openxmlformats.org/drawingml/2006/main">
               <a:ext uri="{FF2B5EF4-FFF2-40B4-BE49-F238E27FC236}">
-                <a16:creationId xmlns:a16="http://schemas.microsoft.com/office/drawing/2014/main" id="{262ACAA2-6074-41F2-B8F1-E3AA0F87AEFB}"/>
+                <a16:creationId xmlns:a16="http://schemas.microsoft.com/office/drawing/2014/main" id="{D6BDF03C-AA3E-4F0E-8209-1E3707296BE4}"/>
               </a:ext>
             </a:extLst>
           </p:cNvPr>
@@ -12341,7 +12541,7 @@
           <p:cNvPr id="12" name="">
             <a:extLst xmlns:a="http://schemas.openxmlformats.org/drawingml/2006/main">
               <a:ext uri="{FF2B5EF4-FFF2-40B4-BE49-F238E27FC236}">
-                <a16:creationId xmlns:a16="http://schemas.microsoft.com/office/drawing/2014/main" id="{82B10AF9-8F66-4971-8945-DA01B9FAA76D}"/>
+                <a16:creationId xmlns:a16="http://schemas.microsoft.com/office/drawing/2014/main" id="{27AAA50A-46FC-43FC-AE58-0BACE5A13131}"/>
               </a:ext>
             </a:extLst>
           </p:cNvPr>
@@ -12398,7 +12598,7 @@
           <p:cNvPr id="13" name="">
             <a:extLst xmlns:a="http://schemas.openxmlformats.org/drawingml/2006/main">
               <a:ext uri="{FF2B5EF4-FFF2-40B4-BE49-F238E27FC236}">
-                <a16:creationId xmlns:a16="http://schemas.microsoft.com/office/drawing/2014/main" id="{45BEA626-CEF0-4A04-90DF-E420A70BBD21}"/>
+                <a16:creationId xmlns:a16="http://schemas.microsoft.com/office/drawing/2014/main" id="{562A5718-35E9-43CB-90E1-88C98911A2B3}"/>
               </a:ext>
             </a:extLst>
           </p:cNvPr>
@@ -12455,7 +12655,7 @@
           <p:cNvPr id="14" name="">
             <a:extLst xmlns:a="http://schemas.openxmlformats.org/drawingml/2006/main">
               <a:ext uri="{FF2B5EF4-FFF2-40B4-BE49-F238E27FC236}">
-                <a16:creationId xmlns:a16="http://schemas.microsoft.com/office/drawing/2014/main" id="{D8E15DB0-95B8-492C-9A36-306CE90A1D6A}"/>
+                <a16:creationId xmlns:a16="http://schemas.microsoft.com/office/drawing/2014/main" id="{8C0FE5F2-3F80-44B6-A4BD-2DB89115B603}"/>
               </a:ext>
             </a:extLst>
           </p:cNvPr>
@@ -12489,7 +12689,7 @@
           <p:cNvPr id="15" name="">
             <a:extLst xmlns:a="http://schemas.openxmlformats.org/drawingml/2006/main">
               <a:ext uri="{FF2B5EF4-FFF2-40B4-BE49-F238E27FC236}">
-                <a16:creationId xmlns:a16="http://schemas.microsoft.com/office/drawing/2014/main" id="{FA78FD39-7EA1-46F9-A113-D9C871F6C6E1}"/>
+                <a16:creationId xmlns:a16="http://schemas.microsoft.com/office/drawing/2014/main" id="{E05ADA5C-B05A-45C7-95FA-A99D7505C8D0}"/>
               </a:ext>
             </a:extLst>
           </p:cNvPr>
@@ -12521,7 +12721,7 @@
           <p:cNvPr id="16" name="">
             <a:extLst xmlns:a="http://schemas.openxmlformats.org/drawingml/2006/main">
               <a:ext uri="{FF2B5EF4-FFF2-40B4-BE49-F238E27FC236}">
-                <a16:creationId xmlns:a16="http://schemas.microsoft.com/office/drawing/2014/main" id="{3F705EEB-BA53-45D7-A1FF-A383C04B6388}"/>
+                <a16:creationId xmlns:a16="http://schemas.microsoft.com/office/drawing/2014/main" id="{E2C41392-EEAC-4FDD-8DE3-DF6FD66D2AF5}"/>
               </a:ext>
             </a:extLst>
           </p:cNvPr>
@@ -12578,7 +12778,7 @@
           <p:cNvPr id="17" name="">
             <a:extLst xmlns:a="http://schemas.openxmlformats.org/drawingml/2006/main">
               <a:ext uri="{FF2B5EF4-FFF2-40B4-BE49-F238E27FC236}">
-                <a16:creationId xmlns:a16="http://schemas.microsoft.com/office/drawing/2014/main" id="{898E8A6D-D5E2-4EFC-9D6E-098C681796EC}"/>
+                <a16:creationId xmlns:a16="http://schemas.microsoft.com/office/drawing/2014/main" id="{F3F59DAE-009C-40F5-B760-D04C8F424A71}"/>
               </a:ext>
             </a:extLst>
           </p:cNvPr>
@@ -12635,7 +12835,7 @@
           <p:cNvPr id="18" name="">
             <a:extLst xmlns:a="http://schemas.openxmlformats.org/drawingml/2006/main">
               <a:ext uri="{FF2B5EF4-FFF2-40B4-BE49-F238E27FC236}">
-                <a16:creationId xmlns:a16="http://schemas.microsoft.com/office/drawing/2014/main" id="{27D3B249-39E6-481C-8FDB-8BC66D1F3665}"/>
+                <a16:creationId xmlns:a16="http://schemas.microsoft.com/office/drawing/2014/main" id="{8A4E763B-BA95-465F-8536-F280D580D25E}"/>
               </a:ext>
             </a:extLst>
           </p:cNvPr>
@@ -12669,7 +12869,7 @@
           <p:cNvPr id="19" name="">
             <a:extLst xmlns:a="http://schemas.openxmlformats.org/drawingml/2006/main">
               <a:ext uri="{FF2B5EF4-FFF2-40B4-BE49-F238E27FC236}">
-                <a16:creationId xmlns:a16="http://schemas.microsoft.com/office/drawing/2014/main" id="{E546DA59-6545-40EB-94FB-62B83BAB1801}"/>
+                <a16:creationId xmlns:a16="http://schemas.microsoft.com/office/drawing/2014/main" id="{B7DDED24-5E2D-4E23-8A95-C2378E51E4F4}"/>
               </a:ext>
             </a:extLst>
           </p:cNvPr>
@@ -12701,7 +12901,7 @@
           <p:cNvPr id="20" name="">
             <a:extLst xmlns:a="http://schemas.openxmlformats.org/drawingml/2006/main">
               <a:ext uri="{FF2B5EF4-FFF2-40B4-BE49-F238E27FC236}">
-                <a16:creationId xmlns:a16="http://schemas.microsoft.com/office/drawing/2014/main" id="{8AC7FDBD-813B-487D-A9E1-8C0BC647AB8D}"/>
+                <a16:creationId xmlns:a16="http://schemas.microsoft.com/office/drawing/2014/main" id="{09B729C0-F7F2-47F8-9A56-232162D83FE3}"/>
               </a:ext>
             </a:extLst>
           </p:cNvPr>
@@ -12758,7 +12958,7 @@
           <p:cNvPr id="21" name="">
             <a:extLst xmlns:a="http://schemas.openxmlformats.org/drawingml/2006/main">
               <a:ext uri="{FF2B5EF4-FFF2-40B4-BE49-F238E27FC236}">
-                <a16:creationId xmlns:a16="http://schemas.microsoft.com/office/drawing/2014/main" id="{25CE2857-FB01-4BF3-8DBD-21017E4DF043}"/>
+                <a16:creationId xmlns:a16="http://schemas.microsoft.com/office/drawing/2014/main" id="{79CA8303-9156-4706-B310-DBDEF05D8906}"/>
               </a:ext>
             </a:extLst>
           </p:cNvPr>
@@ -12815,7 +13015,7 @@
           <p:cNvPr id="22" name="">
             <a:extLst xmlns:a="http://schemas.openxmlformats.org/drawingml/2006/main">
               <a:ext uri="{FF2B5EF4-FFF2-40B4-BE49-F238E27FC236}">
-                <a16:creationId xmlns:a16="http://schemas.microsoft.com/office/drawing/2014/main" id="{DF1DCFD9-DE22-4C1F-8B25-37BD9E6867EC}"/>
+                <a16:creationId xmlns:a16="http://schemas.microsoft.com/office/drawing/2014/main" id="{2E7234EB-D78E-4C51-A723-B61558EC7D12}"/>
               </a:ext>
             </a:extLst>
           </p:cNvPr>
@@ -12870,7 +13070,7 @@
     </p:spTree>
     <p:extLst>
       <p:ext uri="{BB962C8B-B14F-4D97-AF65-F5344CB8AC3E}">
-        <p14:creationId xmlns:p14="http://schemas.microsoft.com/office/powerpoint/2010/main" val="994786777"/>
+        <p14:creationId xmlns:p14="http://schemas.microsoft.com/office/powerpoint/2010/main" val="95318012"/>
       </p:ext>
     </p:extLst>
   </p:cSld>
@@ -13071,7 +13271,7 @@
           <p:cNvPr id="22" name="">
             <a:extLst xmlns:a="http://schemas.openxmlformats.org/drawingml/2006/main">
               <a:ext uri="{FF2B5EF4-FFF2-40B4-BE49-F238E27FC236}">
-                <a16:creationId xmlns:a16="http://schemas.microsoft.com/office/drawing/2014/main" id="{C1F0A6B0-6E46-4106-B0DB-9793A2111FEC}"/>
+                <a16:creationId xmlns:a16="http://schemas.microsoft.com/office/drawing/2014/main" id="{224F247C-9BDF-46D6-8459-742D16B202F6}"/>
               </a:ext>
             </a:extLst>
           </p:cNvPr>
@@ -13103,7 +13303,7 @@
           <p:cNvPr id="2" name="">
             <a:extLst xmlns:a="http://schemas.openxmlformats.org/drawingml/2006/main">
               <a:ext uri="{FF2B5EF4-FFF2-40B4-BE49-F238E27FC236}">
-                <a16:creationId xmlns:a16="http://schemas.microsoft.com/office/drawing/2014/main" id="{D101F2C5-DCC9-4CB2-A019-54F607435030}"/>
+                <a16:creationId xmlns:a16="http://schemas.microsoft.com/office/drawing/2014/main" id="{76A13F4D-8A79-4527-B6BB-707465DC754F}"/>
               </a:ext>
             </a:extLst>
           </p:cNvPr>
@@ -13160,7 +13360,7 @@
           <p:cNvPr id="3" name="">
             <a:extLst xmlns:a="http://schemas.openxmlformats.org/drawingml/2006/main">
               <a:ext uri="{FF2B5EF4-FFF2-40B4-BE49-F238E27FC236}">
-                <a16:creationId xmlns:a16="http://schemas.microsoft.com/office/drawing/2014/main" id="{6212AAFB-C1C8-4D0C-85F3-F4F96400393D}"/>
+                <a16:creationId xmlns:a16="http://schemas.microsoft.com/office/drawing/2014/main" id="{04BAC468-0B6E-4D90-B384-B9E5E037224E}"/>
               </a:ext>
             </a:extLst>
           </p:cNvPr>
@@ -13192,7 +13392,7 @@
           <p:cNvPr id="4" name="">
             <a:extLst xmlns:a="http://schemas.openxmlformats.org/drawingml/2006/main">
               <a:ext uri="{FF2B5EF4-FFF2-40B4-BE49-F238E27FC236}">
-                <a16:creationId xmlns:a16="http://schemas.microsoft.com/office/drawing/2014/main" id="{804D269B-82C1-4AB5-AFF9-821FF10E61ED}"/>
+                <a16:creationId xmlns:a16="http://schemas.microsoft.com/office/drawing/2014/main" id="{C4F3E608-EA9D-4014-8565-51A9F73D3FB7}"/>
               </a:ext>
             </a:extLst>
           </p:cNvPr>
@@ -13249,7 +13449,7 @@
           <p:cNvPr id="5" name="">
             <a:extLst xmlns:a="http://schemas.openxmlformats.org/drawingml/2006/main">
               <a:ext uri="{FF2B5EF4-FFF2-40B4-BE49-F238E27FC236}">
-                <a16:creationId xmlns:a16="http://schemas.microsoft.com/office/drawing/2014/main" id="{4D7D2822-689F-4A49-9ED7-81B41260A69F}"/>
+                <a16:creationId xmlns:a16="http://schemas.microsoft.com/office/drawing/2014/main" id="{CA273D07-F618-4317-8EDC-232B20DA04B3}"/>
               </a:ext>
             </a:extLst>
           </p:cNvPr>
@@ -13306,7 +13506,7 @@
           <p:cNvPr id="6" name="">
             <a:extLst xmlns:a="http://schemas.openxmlformats.org/drawingml/2006/main">
               <a:ext uri="{FF2B5EF4-FFF2-40B4-BE49-F238E27FC236}">
-                <a16:creationId xmlns:a16="http://schemas.microsoft.com/office/drawing/2014/main" id="{7D0F8390-AB47-4B1D-B115-1E6D2BB0B168}"/>
+                <a16:creationId xmlns:a16="http://schemas.microsoft.com/office/drawing/2014/main" id="{E3C6D664-A2B3-47C3-93A5-A9A1C61905B7}"/>
               </a:ext>
             </a:extLst>
           </p:cNvPr>
@@ -13363,7 +13563,7 @@
           <p:cNvPr id="7" name="">
             <a:extLst xmlns:a="http://schemas.openxmlformats.org/drawingml/2006/main">
               <a:ext uri="{FF2B5EF4-FFF2-40B4-BE49-F238E27FC236}">
-                <a16:creationId xmlns:a16="http://schemas.microsoft.com/office/drawing/2014/main" id="{480F2911-E064-4F69-A107-EEA07EB1DF93}"/>
+                <a16:creationId xmlns:a16="http://schemas.microsoft.com/office/drawing/2014/main" id="{FDF8A9EB-AD39-4DD4-B12F-7F3C211065E8}"/>
               </a:ext>
             </a:extLst>
           </p:cNvPr>
@@ -13395,7 +13595,7 @@
           <p:cNvPr id="8" name="">
             <a:extLst xmlns:a="http://schemas.openxmlformats.org/drawingml/2006/main">
               <a:ext uri="{FF2B5EF4-FFF2-40B4-BE49-F238E27FC236}">
-                <a16:creationId xmlns:a16="http://schemas.microsoft.com/office/drawing/2014/main" id="{BAAF487A-5F01-40B0-83BF-33DBE8D96049}"/>
+                <a16:creationId xmlns:a16="http://schemas.microsoft.com/office/drawing/2014/main" id="{35DB741B-4F14-423E-9779-366FD37D89FC}"/>
               </a:ext>
             </a:extLst>
           </p:cNvPr>
@@ -13452,7 +13652,7 @@
           <p:cNvPr id="9" name="">
             <a:extLst xmlns:a="http://schemas.openxmlformats.org/drawingml/2006/main">
               <a:ext uri="{FF2B5EF4-FFF2-40B4-BE49-F238E27FC236}">
-                <a16:creationId xmlns:a16="http://schemas.microsoft.com/office/drawing/2014/main" id="{E6EFA0B9-42A3-461E-9314-45EF2CC4D45A}"/>
+                <a16:creationId xmlns:a16="http://schemas.microsoft.com/office/drawing/2014/main" id="{17F06B7D-7750-464A-B0CA-CEF4376DD4AF}"/>
               </a:ext>
             </a:extLst>
           </p:cNvPr>
@@ -13509,7 +13709,7 @@
           <p:cNvPr id="10" name="">
             <a:extLst xmlns:a="http://schemas.openxmlformats.org/drawingml/2006/main">
               <a:ext uri="{FF2B5EF4-FFF2-40B4-BE49-F238E27FC236}">
-                <a16:creationId xmlns:a16="http://schemas.microsoft.com/office/drawing/2014/main" id="{16894D71-3758-45F4-9615-D1642C33874B}"/>
+                <a16:creationId xmlns:a16="http://schemas.microsoft.com/office/drawing/2014/main" id="{D1A58DD1-E4DD-48A7-8350-0856CA86A87D}"/>
               </a:ext>
             </a:extLst>
           </p:cNvPr>
@@ -13543,7 +13743,7 @@
           <p:cNvPr id="11" name="">
             <a:extLst xmlns:a="http://schemas.openxmlformats.org/drawingml/2006/main">
               <a:ext uri="{FF2B5EF4-FFF2-40B4-BE49-F238E27FC236}">
-                <a16:creationId xmlns:a16="http://schemas.microsoft.com/office/drawing/2014/main" id="{2C5D889C-0BCB-4651-A659-BFFFD0614751}"/>
+                <a16:creationId xmlns:a16="http://schemas.microsoft.com/office/drawing/2014/main" id="{1576D49F-2ED8-4452-8B6F-A2DA1B6E8143}"/>
               </a:ext>
             </a:extLst>
           </p:cNvPr>
@@ -13575,7 +13775,7 @@
           <p:cNvPr id="12" name="">
             <a:extLst xmlns:a="http://schemas.openxmlformats.org/drawingml/2006/main">
               <a:ext uri="{FF2B5EF4-FFF2-40B4-BE49-F238E27FC236}">
-                <a16:creationId xmlns:a16="http://schemas.microsoft.com/office/drawing/2014/main" id="{00D2D841-9EE5-4BB1-B5C6-9F4CAB5216C1}"/>
+                <a16:creationId xmlns:a16="http://schemas.microsoft.com/office/drawing/2014/main" id="{DB87EB5E-B092-4BAC-B24B-9B19CD13B068}"/>
               </a:ext>
             </a:extLst>
           </p:cNvPr>
@@ -13632,7 +13832,7 @@
           <p:cNvPr id="13" name="">
             <a:extLst xmlns:a="http://schemas.openxmlformats.org/drawingml/2006/main">
               <a:ext uri="{FF2B5EF4-FFF2-40B4-BE49-F238E27FC236}">
-                <a16:creationId xmlns:a16="http://schemas.microsoft.com/office/drawing/2014/main" id="{13D37A4E-DF90-4A8B-8761-9F4EAF13AAC4}"/>
+                <a16:creationId xmlns:a16="http://schemas.microsoft.com/office/drawing/2014/main" id="{F09BBD38-4861-42D0-BF73-49513BBEDB93}"/>
               </a:ext>
             </a:extLst>
           </p:cNvPr>
@@ -13689,7 +13889,7 @@
           <p:cNvPr id="14" name="">
             <a:extLst xmlns:a="http://schemas.openxmlformats.org/drawingml/2006/main">
               <a:ext uri="{FF2B5EF4-FFF2-40B4-BE49-F238E27FC236}">
-                <a16:creationId xmlns:a16="http://schemas.microsoft.com/office/drawing/2014/main" id="{433C1793-0F2E-4835-9B56-88DDBFACA011}"/>
+                <a16:creationId xmlns:a16="http://schemas.microsoft.com/office/drawing/2014/main" id="{777E75CC-EFC9-4B69-87C6-955CD31DBB1A}"/>
               </a:ext>
             </a:extLst>
           </p:cNvPr>
@@ -13723,7 +13923,7 @@
           <p:cNvPr id="15" name="">
             <a:extLst xmlns:a="http://schemas.openxmlformats.org/drawingml/2006/main">
               <a:ext uri="{FF2B5EF4-FFF2-40B4-BE49-F238E27FC236}">
-                <a16:creationId xmlns:a16="http://schemas.microsoft.com/office/drawing/2014/main" id="{A1D76BE0-09DD-4D4C-846F-C0229429A7CD}"/>
+                <a16:creationId xmlns:a16="http://schemas.microsoft.com/office/drawing/2014/main" id="{E3E98C6C-6407-4DA2-B362-C75B3841589F}"/>
               </a:ext>
             </a:extLst>
           </p:cNvPr>
@@ -13755,7 +13955,7 @@
           <p:cNvPr id="16" name="">
             <a:extLst xmlns:a="http://schemas.openxmlformats.org/drawingml/2006/main">
               <a:ext uri="{FF2B5EF4-FFF2-40B4-BE49-F238E27FC236}">
-                <a16:creationId xmlns:a16="http://schemas.microsoft.com/office/drawing/2014/main" id="{4529258D-279C-4B95-88EB-455CC51AC6F9}"/>
+                <a16:creationId xmlns:a16="http://schemas.microsoft.com/office/drawing/2014/main" id="{7A852FC8-63AF-4F16-B004-693662492F12}"/>
               </a:ext>
             </a:extLst>
           </p:cNvPr>
@@ -13812,7 +14012,7 @@
           <p:cNvPr id="17" name="">
             <a:extLst xmlns:a="http://schemas.openxmlformats.org/drawingml/2006/main">
               <a:ext uri="{FF2B5EF4-FFF2-40B4-BE49-F238E27FC236}">
-                <a16:creationId xmlns:a16="http://schemas.microsoft.com/office/drawing/2014/main" id="{954AB781-50FD-4E83-968C-E6B2694CB021}"/>
+                <a16:creationId xmlns:a16="http://schemas.microsoft.com/office/drawing/2014/main" id="{DB2BBF30-C41F-41E3-BFA5-D759EA609BC1}"/>
               </a:ext>
             </a:extLst>
           </p:cNvPr>
@@ -13869,7 +14069,7 @@
           <p:cNvPr id="18" name="">
             <a:extLst xmlns:a="http://schemas.openxmlformats.org/drawingml/2006/main">
               <a:ext uri="{FF2B5EF4-FFF2-40B4-BE49-F238E27FC236}">
-                <a16:creationId xmlns:a16="http://schemas.microsoft.com/office/drawing/2014/main" id="{B1325C06-7B90-4BF7-BA64-FBC6072E3A46}"/>
+                <a16:creationId xmlns:a16="http://schemas.microsoft.com/office/drawing/2014/main" id="{1942C21C-032F-4ABE-A08B-AF756A70D813}"/>
               </a:ext>
             </a:extLst>
           </p:cNvPr>
@@ -13903,7 +14103,7 @@
           <p:cNvPr id="19" name="">
             <a:extLst xmlns:a="http://schemas.openxmlformats.org/drawingml/2006/main">
               <a:ext uri="{FF2B5EF4-FFF2-40B4-BE49-F238E27FC236}">
-                <a16:creationId xmlns:a16="http://schemas.microsoft.com/office/drawing/2014/main" id="{9B5D9A99-EAE6-46C1-9FC0-0CDCA09F65C0}"/>
+                <a16:creationId xmlns:a16="http://schemas.microsoft.com/office/drawing/2014/main" id="{FBD13BEA-EF38-44CD-B65E-FE40B209D2C3}"/>
               </a:ext>
             </a:extLst>
           </p:cNvPr>
@@ -13935,7 +14135,7 @@
           <p:cNvPr id="20" name="">
             <a:extLst xmlns:a="http://schemas.openxmlformats.org/drawingml/2006/main">
               <a:ext uri="{FF2B5EF4-FFF2-40B4-BE49-F238E27FC236}">
-                <a16:creationId xmlns:a16="http://schemas.microsoft.com/office/drawing/2014/main" id="{52372BF0-E4E5-4C60-9DEB-922B853AEA2E}"/>
+                <a16:creationId xmlns:a16="http://schemas.microsoft.com/office/drawing/2014/main" id="{A1F72F92-3F12-41C5-959E-2FA76C6C31D4}"/>
               </a:ext>
             </a:extLst>
           </p:cNvPr>
@@ -13992,7 +14192,7 @@
           <p:cNvPr id="21" name="">
             <a:extLst xmlns:a="http://schemas.openxmlformats.org/drawingml/2006/main">
               <a:ext uri="{FF2B5EF4-FFF2-40B4-BE49-F238E27FC236}">
-                <a16:creationId xmlns:a16="http://schemas.microsoft.com/office/drawing/2014/main" id="{497DE54F-1C13-4A94-AC8C-547FAE5280DB}"/>
+                <a16:creationId xmlns:a16="http://schemas.microsoft.com/office/drawing/2014/main" id="{481FF2D1-194D-45B7-B39B-8094B659EE86}"/>
               </a:ext>
             </a:extLst>
           </p:cNvPr>
@@ -14047,7 +14247,7 @@
     </p:spTree>
     <p:extLst>
       <p:ext uri="{BB962C8B-B14F-4D97-AF65-F5344CB8AC3E}">
-        <p14:creationId xmlns:p14="http://schemas.microsoft.com/office/powerpoint/2010/main" val="1559572820"/>
+        <p14:creationId xmlns:p14="http://schemas.microsoft.com/office/powerpoint/2010/main" val="2036920418"/>
       </p:ext>
     </p:extLst>
   </p:cSld>
